--- a/public/lessons/year-6-maths/autumn/week-6/use-brackets-to-change-the-order/teaching-powerpoint-v1.pptx
+++ b/public/lessons/year-6-maths/autumn/week-6/use-brackets-to-change-the-order/teaching-powerpoint-v1.pptx
@@ -2,24 +2,24 @@
 <file path=ppt/presentation.xml><?xml version="1.0" encoding="utf-8"?>
 <p:presentation xmlns:p="http://schemas.openxmlformats.org/presentationml/2006/main">
   <p:sldMasterIdLst>
-    <p:sldMasterId xmlns:r="http://schemas.openxmlformats.org/officeDocument/2006/relationships" id="2147483648" r:id="R4b253774a24d498a"/>
+    <p:sldMasterId xmlns:r="http://schemas.openxmlformats.org/officeDocument/2006/relationships" id="2147483648" r:id="R56720a633fdb4249"/>
   </p:sldMasterIdLst>
   <p:notesMasterIdLst>
-    <p:notesMasterId xmlns:r="http://schemas.openxmlformats.org/officeDocument/2006/relationships" r:id="R7a02a1912c684aba"/>
+    <p:notesMasterId xmlns:r="http://schemas.openxmlformats.org/officeDocument/2006/relationships" r:id="R89bbecec6e794ccc"/>
   </p:notesMasterIdLst>
   <p:sldIdLst>
-    <p:sldId xmlns:r="http://schemas.openxmlformats.org/officeDocument/2006/relationships" id="256" r:id="Rf2aed6977a2e4216"/>
-    <p:sldId xmlns:r="http://schemas.openxmlformats.org/officeDocument/2006/relationships" id="257" r:id="Reebff6c22e5c44c9"/>
-    <p:sldId xmlns:r="http://schemas.openxmlformats.org/officeDocument/2006/relationships" id="258" r:id="R4de2d648f184411b"/>
-    <p:sldId xmlns:r="http://schemas.openxmlformats.org/officeDocument/2006/relationships" id="259" r:id="R15b22c98c6cd44b0"/>
-    <p:sldId xmlns:r="http://schemas.openxmlformats.org/officeDocument/2006/relationships" id="260" r:id="Rd96ae58e567246ef"/>
-    <p:sldId xmlns:r="http://schemas.openxmlformats.org/officeDocument/2006/relationships" id="261" r:id="Ra46b3b7149634fe9"/>
-    <p:sldId xmlns:r="http://schemas.openxmlformats.org/officeDocument/2006/relationships" id="262" r:id="Raedb0334779a4a15"/>
-    <p:sldId xmlns:r="http://schemas.openxmlformats.org/officeDocument/2006/relationships" id="263" r:id="R93ba9daea0104732"/>
-    <p:sldId xmlns:r="http://schemas.openxmlformats.org/officeDocument/2006/relationships" id="264" r:id="R5e078e8fd1a44c72"/>
-    <p:sldId xmlns:r="http://schemas.openxmlformats.org/officeDocument/2006/relationships" id="265" r:id="Rdc19916f956144f8"/>
-    <p:sldId xmlns:r="http://schemas.openxmlformats.org/officeDocument/2006/relationships" id="266" r:id="Rb9bdb273a3b74da5"/>
-    <p:sldId xmlns:r="http://schemas.openxmlformats.org/officeDocument/2006/relationships" id="267" r:id="R23d2623030544409"/>
+    <p:sldId xmlns:r="http://schemas.openxmlformats.org/officeDocument/2006/relationships" id="256" r:id="Rc88020b7d36a4514"/>
+    <p:sldId xmlns:r="http://schemas.openxmlformats.org/officeDocument/2006/relationships" id="257" r:id="Rfb2cd5b51d46447c"/>
+    <p:sldId xmlns:r="http://schemas.openxmlformats.org/officeDocument/2006/relationships" id="258" r:id="Rdc8900e3653f4324"/>
+    <p:sldId xmlns:r="http://schemas.openxmlformats.org/officeDocument/2006/relationships" id="259" r:id="R3a9620ebfd56401a"/>
+    <p:sldId xmlns:r="http://schemas.openxmlformats.org/officeDocument/2006/relationships" id="260" r:id="R468fd02d319549ab"/>
+    <p:sldId xmlns:r="http://schemas.openxmlformats.org/officeDocument/2006/relationships" id="261" r:id="Rbc72e53b6a504433"/>
+    <p:sldId xmlns:r="http://schemas.openxmlformats.org/officeDocument/2006/relationships" id="262" r:id="R2b6e98e5dbae4368"/>
+    <p:sldId xmlns:r="http://schemas.openxmlformats.org/officeDocument/2006/relationships" id="263" r:id="R094665f27f1c4d0c"/>
+    <p:sldId xmlns:r="http://schemas.openxmlformats.org/officeDocument/2006/relationships" id="264" r:id="R772fc05f3aae4a34"/>
+    <p:sldId xmlns:r="http://schemas.openxmlformats.org/officeDocument/2006/relationships" id="265" r:id="Rdf0aeebabdf5491f"/>
+    <p:sldId xmlns:r="http://schemas.openxmlformats.org/officeDocument/2006/relationships" id="266" r:id="R6388129638544f2c"/>
+    <p:sldId xmlns:r="http://schemas.openxmlformats.org/officeDocument/2006/relationships" id="267" r:id="Rd2dbdee1334c427a"/>
   </p:sldIdLst>
   <p:sldSz cx="12192000" cy="6858000"/>
   <p:notesSz cx="6858000" cy="9144000"/>
@@ -873,7 +873,7 @@
           <a:lstStyle xmlns:a="http://schemas.openxmlformats.org/drawingml/2006/main"/>
           <a:p xmlns:a="http://schemas.openxmlformats.org/drawingml/2006/main">
             <a:r>
-              <a:t>I do. Reveal the question, setup and each calculation stage one click at a time. Pupils watch before copying. Model answer: 20.</a:t>
+              <a:t>I do. Reveal the question, then reveal each mathematical change one click at a time. Point to the numbers and operation that changed before moving to the next line. Final answer: 20.</a:t>
             </a:r>
           </a:p>
         </p:txBody>
@@ -1291,7 +1291,7 @@
   </p:cSld>
   <p:clrMap bg1="lt1" tx1="dk1" bg2="lt2" tx2="dk2" accent1="accent1" accent2="accent2" accent3="accent3" accent4="accent4" accent5="accent5" accent6="accent6" hlink="hlink" folHlink="folHlink"/>
   <p:sldLayoutIdLst>
-    <p:sldLayoutId xmlns:r="http://schemas.openxmlformats.org/officeDocument/2006/relationships" id="2147483649" r:id="R9dc2504098a84347"/>
+    <p:sldLayoutId xmlns:r="http://schemas.openxmlformats.org/officeDocument/2006/relationships" id="2147483649" r:id="R202188f67d1a42a6"/>
   </p:sldLayoutIdLst>
   <p:txStyles>
     <p:titleStyle>
@@ -1842,7 +1842,7 @@
           <p:cNvPr id="12" name="">
             <a:extLst xmlns:a="http://schemas.openxmlformats.org/drawingml/2006/main">
               <a:ext uri="{FF2B5EF4-FFF2-40B4-BE49-F238E27FC236}">
-                <a16:creationId xmlns:a16="http://schemas.microsoft.com/office/drawing/2014/main" id="{5C33DD39-09DE-4B31-936A-302CF4A394FC}"/>
+                <a16:creationId xmlns:a16="http://schemas.microsoft.com/office/drawing/2014/main" id="{22EB8049-2BC7-4326-B688-211ECA52B529}"/>
               </a:ext>
             </a:extLst>
           </p:cNvPr>
@@ -1874,7 +1874,7 @@
           <p:cNvPr id="2" name="">
             <a:extLst xmlns:a="http://schemas.openxmlformats.org/drawingml/2006/main">
               <a:ext uri="{FF2B5EF4-FFF2-40B4-BE49-F238E27FC236}">
-                <a16:creationId xmlns:a16="http://schemas.microsoft.com/office/drawing/2014/main" id="{25420A40-FE36-4AEF-A74C-10F45AAE58CF}"/>
+                <a16:creationId xmlns:a16="http://schemas.microsoft.com/office/drawing/2014/main" id="{D2514EDF-D539-4278-8BED-52B94D0953C8}"/>
               </a:ext>
             </a:extLst>
           </p:cNvPr>
@@ -1931,7 +1931,7 @@
           <p:cNvPr id="3" name="">
             <a:extLst xmlns:a="http://schemas.openxmlformats.org/drawingml/2006/main">
               <a:ext uri="{FF2B5EF4-FFF2-40B4-BE49-F238E27FC236}">
-                <a16:creationId xmlns:a16="http://schemas.microsoft.com/office/drawing/2014/main" id="{70CB6C80-BC47-4C94-8791-09BC667410F1}"/>
+                <a16:creationId xmlns:a16="http://schemas.microsoft.com/office/drawing/2014/main" id="{0CA0B76A-460B-446A-A4B9-24D4177C209D}"/>
               </a:ext>
             </a:extLst>
           </p:cNvPr>
@@ -1965,7 +1965,7 @@
           <p:cNvPr id="4" name="">
             <a:extLst xmlns:a="http://schemas.openxmlformats.org/drawingml/2006/main">
               <a:ext uri="{FF2B5EF4-FFF2-40B4-BE49-F238E27FC236}">
-                <a16:creationId xmlns:a16="http://schemas.microsoft.com/office/drawing/2014/main" id="{9BAB79F9-6DF8-470E-9C77-F648E42D104A}"/>
+                <a16:creationId xmlns:a16="http://schemas.microsoft.com/office/drawing/2014/main" id="{F44BC010-9B59-4BDC-9E21-AD11649A311E}"/>
               </a:ext>
             </a:extLst>
           </p:cNvPr>
@@ -2022,7 +2022,7 @@
           <p:cNvPr id="5" name="">
             <a:extLst xmlns:a="http://schemas.openxmlformats.org/drawingml/2006/main">
               <a:ext uri="{FF2B5EF4-FFF2-40B4-BE49-F238E27FC236}">
-                <a16:creationId xmlns:a16="http://schemas.microsoft.com/office/drawing/2014/main" id="{65DECFDC-CF6F-41D8-BB4A-E70D717D1781}"/>
+                <a16:creationId xmlns:a16="http://schemas.microsoft.com/office/drawing/2014/main" id="{FF2B6B6C-BF66-4923-848C-743B3BC836F5}"/>
               </a:ext>
             </a:extLst>
           </p:cNvPr>
@@ -2079,7 +2079,7 @@
           <p:cNvPr id="6" name="">
             <a:extLst xmlns:a="http://schemas.openxmlformats.org/drawingml/2006/main">
               <a:ext uri="{FF2B5EF4-FFF2-40B4-BE49-F238E27FC236}">
-                <a16:creationId xmlns:a16="http://schemas.microsoft.com/office/drawing/2014/main" id="{89E2961B-EDFD-4BE3-8691-254562059711}"/>
+                <a16:creationId xmlns:a16="http://schemas.microsoft.com/office/drawing/2014/main" id="{E5FC8310-230B-416C-BF6B-2D95A8429415}"/>
               </a:ext>
             </a:extLst>
           </p:cNvPr>
@@ -2113,7 +2113,7 @@
           <p:cNvPr id="7" name="">
             <a:extLst xmlns:a="http://schemas.openxmlformats.org/drawingml/2006/main">
               <a:ext uri="{FF2B5EF4-FFF2-40B4-BE49-F238E27FC236}">
-                <a16:creationId xmlns:a16="http://schemas.microsoft.com/office/drawing/2014/main" id="{CA40775D-780E-46FB-80AA-7659ABC8A0F2}"/>
+                <a16:creationId xmlns:a16="http://schemas.microsoft.com/office/drawing/2014/main" id="{B29C9E29-AA9A-4BE9-A3C8-BCF55DADF83C}"/>
               </a:ext>
             </a:extLst>
           </p:cNvPr>
@@ -2170,7 +2170,7 @@
           <p:cNvPr id="8" name="">
             <a:extLst xmlns:a="http://schemas.openxmlformats.org/drawingml/2006/main">
               <a:ext uri="{FF2B5EF4-FFF2-40B4-BE49-F238E27FC236}">
-                <a16:creationId xmlns:a16="http://schemas.microsoft.com/office/drawing/2014/main" id="{0721F233-3258-4D06-8324-B322BC5187F4}"/>
+                <a16:creationId xmlns:a16="http://schemas.microsoft.com/office/drawing/2014/main" id="{8C396C4B-902F-4022-ADA8-8527ED2934B5}"/>
               </a:ext>
             </a:extLst>
           </p:cNvPr>
@@ -2227,7 +2227,7 @@
           <p:cNvPr id="9" name="">
             <a:extLst xmlns:a="http://schemas.openxmlformats.org/drawingml/2006/main">
               <a:ext uri="{FF2B5EF4-FFF2-40B4-BE49-F238E27FC236}">
-                <a16:creationId xmlns:a16="http://schemas.microsoft.com/office/drawing/2014/main" id="{D48835E7-07DE-4B6B-B804-DFF7D1F0707B}"/>
+                <a16:creationId xmlns:a16="http://schemas.microsoft.com/office/drawing/2014/main" id="{E8869378-C2C0-4F31-A5B9-67608CA98814}"/>
               </a:ext>
             </a:extLst>
           </p:cNvPr>
@@ -2284,7 +2284,7 @@
           <p:cNvPr id="10" name="">
             <a:extLst xmlns:a="http://schemas.openxmlformats.org/drawingml/2006/main">
               <a:ext uri="{FF2B5EF4-FFF2-40B4-BE49-F238E27FC236}">
-                <a16:creationId xmlns:a16="http://schemas.microsoft.com/office/drawing/2014/main" id="{9C6D4F80-C263-4025-A225-7B7F77D78222}"/>
+                <a16:creationId xmlns:a16="http://schemas.microsoft.com/office/drawing/2014/main" id="{51E93D8D-B0AB-4A6D-8627-588CC3C6543D}"/>
               </a:ext>
             </a:extLst>
           </p:cNvPr>
@@ -2341,7 +2341,7 @@
           <p:cNvPr id="11" name="">
             <a:extLst xmlns:a="http://schemas.openxmlformats.org/drawingml/2006/main">
               <a:ext uri="{FF2B5EF4-FFF2-40B4-BE49-F238E27FC236}">
-                <a16:creationId xmlns:a16="http://schemas.microsoft.com/office/drawing/2014/main" id="{7AC4A960-696B-4338-940A-F1EAFDC0A997}"/>
+                <a16:creationId xmlns:a16="http://schemas.microsoft.com/office/drawing/2014/main" id="{A4E971F6-ACFB-4746-A358-6BE8624FC383}"/>
               </a:ext>
             </a:extLst>
           </p:cNvPr>
@@ -2396,7 +2396,7 @@
     </p:spTree>
     <p:extLst>
       <p:ext uri="{BB962C8B-B14F-4D97-AF65-F5344CB8AC3E}">
-        <p14:creationId xmlns:p14="http://schemas.microsoft.com/office/powerpoint/2010/main" val="1128452253"/>
+        <p14:creationId xmlns:p14="http://schemas.microsoft.com/office/powerpoint/2010/main" val="705793227"/>
       </p:ext>
     </p:extLst>
   </p:cSld>
@@ -2427,7 +2427,7 @@
           <p:cNvPr id="14" name="">
             <a:extLst xmlns:a="http://schemas.openxmlformats.org/drawingml/2006/main">
               <a:ext uri="{FF2B5EF4-FFF2-40B4-BE49-F238E27FC236}">
-                <a16:creationId xmlns:a16="http://schemas.microsoft.com/office/drawing/2014/main" id="{5028C651-C2A7-485D-AC0A-BB7C1B7FBF09}"/>
+                <a16:creationId xmlns:a16="http://schemas.microsoft.com/office/drawing/2014/main" id="{15D35889-6DC9-4F4B-B46E-965C8613B635}"/>
               </a:ext>
             </a:extLst>
           </p:cNvPr>
@@ -2459,7 +2459,7 @@
           <p:cNvPr id="2" name="">
             <a:extLst xmlns:a="http://schemas.openxmlformats.org/drawingml/2006/main">
               <a:ext uri="{FF2B5EF4-FFF2-40B4-BE49-F238E27FC236}">
-                <a16:creationId xmlns:a16="http://schemas.microsoft.com/office/drawing/2014/main" id="{9BF069E0-2BB6-414D-9CDC-4A8FA57A023B}"/>
+                <a16:creationId xmlns:a16="http://schemas.microsoft.com/office/drawing/2014/main" id="{DA86C30D-27F4-4A02-BC56-2EE36BE53513}"/>
               </a:ext>
             </a:extLst>
           </p:cNvPr>
@@ -2516,7 +2516,7 @@
           <p:cNvPr id="3" name="">
             <a:extLst xmlns:a="http://schemas.openxmlformats.org/drawingml/2006/main">
               <a:ext uri="{FF2B5EF4-FFF2-40B4-BE49-F238E27FC236}">
-                <a16:creationId xmlns:a16="http://schemas.microsoft.com/office/drawing/2014/main" id="{2923B123-A18E-4EA6-8569-A400146AF458}"/>
+                <a16:creationId xmlns:a16="http://schemas.microsoft.com/office/drawing/2014/main" id="{B9B7DD9E-426F-402D-BA15-DFFC21AD16B4}"/>
               </a:ext>
             </a:extLst>
           </p:cNvPr>
@@ -2548,7 +2548,7 @@
           <p:cNvPr id="4" name="">
             <a:extLst xmlns:a="http://schemas.openxmlformats.org/drawingml/2006/main">
               <a:ext uri="{FF2B5EF4-FFF2-40B4-BE49-F238E27FC236}">
-                <a16:creationId xmlns:a16="http://schemas.microsoft.com/office/drawing/2014/main" id="{1B50272D-0C1C-4E0F-9E40-6E45016FBDC1}"/>
+                <a16:creationId xmlns:a16="http://schemas.microsoft.com/office/drawing/2014/main" id="{077C1023-2A0A-496A-88AC-8D3DC38DA71E}"/>
               </a:ext>
             </a:extLst>
           </p:cNvPr>
@@ -2605,7 +2605,7 @@
           <p:cNvPr id="5" name="">
             <a:extLst xmlns:a="http://schemas.openxmlformats.org/drawingml/2006/main">
               <a:ext uri="{FF2B5EF4-FFF2-40B4-BE49-F238E27FC236}">
-                <a16:creationId xmlns:a16="http://schemas.microsoft.com/office/drawing/2014/main" id="{B73E18B5-BE04-40DA-8757-EDF8A5399250}"/>
+                <a16:creationId xmlns:a16="http://schemas.microsoft.com/office/drawing/2014/main" id="{8EED5BEE-5D78-4969-A67B-E0D8973171ED}"/>
               </a:ext>
             </a:extLst>
           </p:cNvPr>
@@ -2662,7 +2662,7 @@
           <p:cNvPr id="6" name="">
             <a:extLst xmlns:a="http://schemas.openxmlformats.org/drawingml/2006/main">
               <a:ext uri="{FF2B5EF4-FFF2-40B4-BE49-F238E27FC236}">
-                <a16:creationId xmlns:a16="http://schemas.microsoft.com/office/drawing/2014/main" id="{FF4C3553-2DBE-456C-853F-17C2A926F202}"/>
+                <a16:creationId xmlns:a16="http://schemas.microsoft.com/office/drawing/2014/main" id="{A62F1DEA-7E07-4479-AE1F-98B1DB6FDBCB}"/>
               </a:ext>
             </a:extLst>
           </p:cNvPr>
@@ -2719,7 +2719,7 @@
           <p:cNvPr id="7" name="">
             <a:extLst xmlns:a="http://schemas.openxmlformats.org/drawingml/2006/main">
               <a:ext uri="{FF2B5EF4-FFF2-40B4-BE49-F238E27FC236}">
-                <a16:creationId xmlns:a16="http://schemas.microsoft.com/office/drawing/2014/main" id="{73B065E4-5C12-4C3E-B6AC-F88A82CF042C}"/>
+                <a16:creationId xmlns:a16="http://schemas.microsoft.com/office/drawing/2014/main" id="{331791BA-08D2-4E9A-96D2-E7ABF0BFCC9D}"/>
               </a:ext>
             </a:extLst>
           </p:cNvPr>
@@ -2751,7 +2751,7 @@
           <p:cNvPr id="8" name="">
             <a:extLst xmlns:a="http://schemas.openxmlformats.org/drawingml/2006/main">
               <a:ext uri="{FF2B5EF4-FFF2-40B4-BE49-F238E27FC236}">
-                <a16:creationId xmlns:a16="http://schemas.microsoft.com/office/drawing/2014/main" id="{E9394867-4EEB-4000-9330-4530F99FB554}"/>
+                <a16:creationId xmlns:a16="http://schemas.microsoft.com/office/drawing/2014/main" id="{096B682F-8418-43C8-9CE4-DF9DBB65196F}"/>
               </a:ext>
             </a:extLst>
           </p:cNvPr>
@@ -2808,7 +2808,7 @@
           <p:cNvPr id="9" name="">
             <a:extLst xmlns:a="http://schemas.openxmlformats.org/drawingml/2006/main">
               <a:ext uri="{FF2B5EF4-FFF2-40B4-BE49-F238E27FC236}">
-                <a16:creationId xmlns:a16="http://schemas.microsoft.com/office/drawing/2014/main" id="{BE679BD8-7FD4-48B6-85E6-84C1C08C06FE}"/>
+                <a16:creationId xmlns:a16="http://schemas.microsoft.com/office/drawing/2014/main" id="{E9DDE9A2-011B-4319-8D78-B40BCA6C4B15}"/>
               </a:ext>
             </a:extLst>
           </p:cNvPr>
@@ -2865,7 +2865,7 @@
           <p:cNvPr id="10" name="">
             <a:extLst xmlns:a="http://schemas.openxmlformats.org/drawingml/2006/main">
               <a:ext uri="{FF2B5EF4-FFF2-40B4-BE49-F238E27FC236}">
-                <a16:creationId xmlns:a16="http://schemas.microsoft.com/office/drawing/2014/main" id="{311DC63B-F447-4561-B08B-50A116FD360E}"/>
+                <a16:creationId xmlns:a16="http://schemas.microsoft.com/office/drawing/2014/main" id="{B2B1E01D-BDC4-4FA9-84FA-11F9DC09A41E}"/>
               </a:ext>
             </a:extLst>
           </p:cNvPr>
@@ -2922,7 +2922,7 @@
           <p:cNvPr id="11" name="">
             <a:extLst xmlns:a="http://schemas.openxmlformats.org/drawingml/2006/main">
               <a:ext uri="{FF2B5EF4-FFF2-40B4-BE49-F238E27FC236}">
-                <a16:creationId xmlns:a16="http://schemas.microsoft.com/office/drawing/2014/main" id="{01CB46DC-5DAA-4A63-8AED-F5FB78C7BD9D}"/>
+                <a16:creationId xmlns:a16="http://schemas.microsoft.com/office/drawing/2014/main" id="{2274FD67-3663-4081-9F65-20C27850EE43}"/>
               </a:ext>
             </a:extLst>
           </p:cNvPr>
@@ -2979,7 +2979,7 @@
           <p:cNvPr id="12" name="">
             <a:extLst xmlns:a="http://schemas.openxmlformats.org/drawingml/2006/main">
               <a:ext uri="{FF2B5EF4-FFF2-40B4-BE49-F238E27FC236}">
-                <a16:creationId xmlns:a16="http://schemas.microsoft.com/office/drawing/2014/main" id="{6E6D45F7-74AA-4B94-B12D-0132D254E3F7}"/>
+                <a16:creationId xmlns:a16="http://schemas.microsoft.com/office/drawing/2014/main" id="{F7C99C3B-48B1-4E19-954B-4A849D126CA4}"/>
               </a:ext>
             </a:extLst>
           </p:cNvPr>
@@ -3036,7 +3036,7 @@
           <p:cNvPr id="13" name="">
             <a:extLst xmlns:a="http://schemas.openxmlformats.org/drawingml/2006/main">
               <a:ext uri="{FF2B5EF4-FFF2-40B4-BE49-F238E27FC236}">
-                <a16:creationId xmlns:a16="http://schemas.microsoft.com/office/drawing/2014/main" id="{EFACACC8-181D-4B80-B9E6-0106813AE3B9}"/>
+                <a16:creationId xmlns:a16="http://schemas.microsoft.com/office/drawing/2014/main" id="{401607FE-7BDF-4BCE-AD45-C4A55BF7C5F4}"/>
               </a:ext>
             </a:extLst>
           </p:cNvPr>
@@ -3091,7 +3091,7 @@
     </p:spTree>
     <p:extLst>
       <p:ext uri="{BB962C8B-B14F-4D97-AF65-F5344CB8AC3E}">
-        <p14:creationId xmlns:p14="http://schemas.microsoft.com/office/powerpoint/2010/main" val="1483902537"/>
+        <p14:creationId xmlns:p14="http://schemas.microsoft.com/office/powerpoint/2010/main" val="1876776737"/>
       </p:ext>
     </p:extLst>
   </p:cSld>
@@ -3292,7 +3292,7 @@
           <p:cNvPr id="19" name="">
             <a:extLst xmlns:a="http://schemas.openxmlformats.org/drawingml/2006/main">
               <a:ext uri="{FF2B5EF4-FFF2-40B4-BE49-F238E27FC236}">
-                <a16:creationId xmlns:a16="http://schemas.microsoft.com/office/drawing/2014/main" id="{778B524D-1631-4AB9-8DA1-D4722E63F41B}"/>
+                <a16:creationId xmlns:a16="http://schemas.microsoft.com/office/drawing/2014/main" id="{E097678A-15AF-453E-B742-27806072B15C}"/>
               </a:ext>
             </a:extLst>
           </p:cNvPr>
@@ -3324,7 +3324,7 @@
           <p:cNvPr id="2" name="">
             <a:extLst xmlns:a="http://schemas.openxmlformats.org/drawingml/2006/main">
               <a:ext uri="{FF2B5EF4-FFF2-40B4-BE49-F238E27FC236}">
-                <a16:creationId xmlns:a16="http://schemas.microsoft.com/office/drawing/2014/main" id="{FDA05FC8-709F-4959-B463-649F774A119F}"/>
+                <a16:creationId xmlns:a16="http://schemas.microsoft.com/office/drawing/2014/main" id="{2F43576A-2601-4DDF-BD7C-0A1EC9C3E083}"/>
               </a:ext>
             </a:extLst>
           </p:cNvPr>
@@ -3381,7 +3381,7 @@
           <p:cNvPr id="3" name="">
             <a:extLst xmlns:a="http://schemas.openxmlformats.org/drawingml/2006/main">
               <a:ext uri="{FF2B5EF4-FFF2-40B4-BE49-F238E27FC236}">
-                <a16:creationId xmlns:a16="http://schemas.microsoft.com/office/drawing/2014/main" id="{5AD50F19-6A1F-469E-B65A-C43299B1698B}"/>
+                <a16:creationId xmlns:a16="http://schemas.microsoft.com/office/drawing/2014/main" id="{397AA1C4-D52A-4BE9-8FCB-78E4347826AC}"/>
               </a:ext>
             </a:extLst>
           </p:cNvPr>
@@ -3413,7 +3413,7 @@
           <p:cNvPr id="4" name="">
             <a:extLst xmlns:a="http://schemas.openxmlformats.org/drawingml/2006/main">
               <a:ext uri="{FF2B5EF4-FFF2-40B4-BE49-F238E27FC236}">
-                <a16:creationId xmlns:a16="http://schemas.microsoft.com/office/drawing/2014/main" id="{ABAD295F-1A1D-4A24-A613-B0D409B93D00}"/>
+                <a16:creationId xmlns:a16="http://schemas.microsoft.com/office/drawing/2014/main" id="{A2BEBDF9-D41C-4C89-86A4-F489190A75AC}"/>
               </a:ext>
             </a:extLst>
           </p:cNvPr>
@@ -3470,7 +3470,7 @@
           <p:cNvPr id="5" name="">
             <a:extLst xmlns:a="http://schemas.openxmlformats.org/drawingml/2006/main">
               <a:ext uri="{FF2B5EF4-FFF2-40B4-BE49-F238E27FC236}">
-                <a16:creationId xmlns:a16="http://schemas.microsoft.com/office/drawing/2014/main" id="{B4BE1841-BCCC-4543-A6DB-AD0927DD5787}"/>
+                <a16:creationId xmlns:a16="http://schemas.microsoft.com/office/drawing/2014/main" id="{FB578376-2287-4DFB-8072-58BEEA2E1E55}"/>
               </a:ext>
             </a:extLst>
           </p:cNvPr>
@@ -3527,7 +3527,7 @@
           <p:cNvPr id="6" name="">
             <a:extLst xmlns:a="http://schemas.openxmlformats.org/drawingml/2006/main">
               <a:ext uri="{FF2B5EF4-FFF2-40B4-BE49-F238E27FC236}">
-                <a16:creationId xmlns:a16="http://schemas.microsoft.com/office/drawing/2014/main" id="{BD19151C-33E6-4B85-98C4-9B849B909BBD}"/>
+                <a16:creationId xmlns:a16="http://schemas.microsoft.com/office/drawing/2014/main" id="{685444FA-CBFD-4EF5-B518-399DF8890914}"/>
               </a:ext>
             </a:extLst>
           </p:cNvPr>
@@ -3584,7 +3584,7 @@
           <p:cNvPr id="7" name="">
             <a:extLst xmlns:a="http://schemas.openxmlformats.org/drawingml/2006/main">
               <a:ext uri="{FF2B5EF4-FFF2-40B4-BE49-F238E27FC236}">
-                <a16:creationId xmlns:a16="http://schemas.microsoft.com/office/drawing/2014/main" id="{3E15812F-4EBC-44D0-91CD-5EF25172346A}"/>
+                <a16:creationId xmlns:a16="http://schemas.microsoft.com/office/drawing/2014/main" id="{D7AA1639-EF56-4EF7-94C3-D7FF2AFF3DCE}"/>
               </a:ext>
             </a:extLst>
           </p:cNvPr>
@@ -3616,7 +3616,7 @@
           <p:cNvPr id="8" name="">
             <a:extLst xmlns:a="http://schemas.openxmlformats.org/drawingml/2006/main">
               <a:ext uri="{FF2B5EF4-FFF2-40B4-BE49-F238E27FC236}">
-                <a16:creationId xmlns:a16="http://schemas.microsoft.com/office/drawing/2014/main" id="{67486DDA-D629-4E1B-A058-BBEE8E5922D2}"/>
+                <a16:creationId xmlns:a16="http://schemas.microsoft.com/office/drawing/2014/main" id="{43979905-1EFD-47A9-A4C6-176ABDE91638}"/>
               </a:ext>
             </a:extLst>
           </p:cNvPr>
@@ -3673,7 +3673,7 @@
           <p:cNvPr id="9" name="">
             <a:extLst xmlns:a="http://schemas.openxmlformats.org/drawingml/2006/main">
               <a:ext uri="{FF2B5EF4-FFF2-40B4-BE49-F238E27FC236}">
-                <a16:creationId xmlns:a16="http://schemas.microsoft.com/office/drawing/2014/main" id="{E579D4FE-A02A-4B96-8148-C9E4CCA8562E}"/>
+                <a16:creationId xmlns:a16="http://schemas.microsoft.com/office/drawing/2014/main" id="{FF5BC07E-DA5C-4583-95BC-6AC5F5235D68}"/>
               </a:ext>
             </a:extLst>
           </p:cNvPr>
@@ -3730,7 +3730,7 @@
           <p:cNvPr id="10" name="">
             <a:extLst xmlns:a="http://schemas.openxmlformats.org/drawingml/2006/main">
               <a:ext uri="{FF2B5EF4-FFF2-40B4-BE49-F238E27FC236}">
-                <a16:creationId xmlns:a16="http://schemas.microsoft.com/office/drawing/2014/main" id="{62E0B54E-008E-488E-ACB5-0EBC302AF2AE}"/>
+                <a16:creationId xmlns:a16="http://schemas.microsoft.com/office/drawing/2014/main" id="{D7B6DB89-CF14-4D81-A4AF-5B3D16717E0F}"/>
               </a:ext>
             </a:extLst>
           </p:cNvPr>
@@ -3787,7 +3787,7 @@
           <p:cNvPr id="11" name="">
             <a:extLst xmlns:a="http://schemas.openxmlformats.org/drawingml/2006/main">
               <a:ext uri="{FF2B5EF4-FFF2-40B4-BE49-F238E27FC236}">
-                <a16:creationId xmlns:a16="http://schemas.microsoft.com/office/drawing/2014/main" id="{68C3A419-D0BC-42E5-9F62-56210F45ED87}"/>
+                <a16:creationId xmlns:a16="http://schemas.microsoft.com/office/drawing/2014/main" id="{8206A48C-5BD4-427C-8BD4-7DC0B56C03EB}"/>
               </a:ext>
             </a:extLst>
           </p:cNvPr>
@@ -3821,7 +3821,7 @@
           <p:cNvPr id="12" name="">
             <a:extLst xmlns:a="http://schemas.openxmlformats.org/drawingml/2006/main">
               <a:ext uri="{FF2B5EF4-FFF2-40B4-BE49-F238E27FC236}">
-                <a16:creationId xmlns:a16="http://schemas.microsoft.com/office/drawing/2014/main" id="{E4C92EB1-FFC4-4F2E-9668-948039281ABD}"/>
+                <a16:creationId xmlns:a16="http://schemas.microsoft.com/office/drawing/2014/main" id="{EA117556-A8B1-40E1-8C92-3BACE559D412}"/>
               </a:ext>
             </a:extLst>
           </p:cNvPr>
@@ -3878,7 +3878,7 @@
           <p:cNvPr id="13" name="">
             <a:extLst xmlns:a="http://schemas.openxmlformats.org/drawingml/2006/main">
               <a:ext uri="{FF2B5EF4-FFF2-40B4-BE49-F238E27FC236}">
-                <a16:creationId xmlns:a16="http://schemas.microsoft.com/office/drawing/2014/main" id="{20C1E6C9-78A8-4154-AC55-8FB5A37BA466}"/>
+                <a16:creationId xmlns:a16="http://schemas.microsoft.com/office/drawing/2014/main" id="{643903B2-3C1D-4B94-B196-4B60948729C8}"/>
               </a:ext>
             </a:extLst>
           </p:cNvPr>
@@ -3935,7 +3935,7 @@
           <p:cNvPr id="14" name="">
             <a:extLst xmlns:a="http://schemas.openxmlformats.org/drawingml/2006/main">
               <a:ext uri="{FF2B5EF4-FFF2-40B4-BE49-F238E27FC236}">
-                <a16:creationId xmlns:a16="http://schemas.microsoft.com/office/drawing/2014/main" id="{A7D09226-618C-4391-8CD8-33F76BA9B299}"/>
+                <a16:creationId xmlns:a16="http://schemas.microsoft.com/office/drawing/2014/main" id="{A1AC387E-8522-40B2-949D-37EA97D5B7F7}"/>
               </a:ext>
             </a:extLst>
           </p:cNvPr>
@@ -3992,7 +3992,7 @@
           <p:cNvPr id="15" name="">
             <a:extLst xmlns:a="http://schemas.openxmlformats.org/drawingml/2006/main">
               <a:ext uri="{FF2B5EF4-FFF2-40B4-BE49-F238E27FC236}">
-                <a16:creationId xmlns:a16="http://schemas.microsoft.com/office/drawing/2014/main" id="{17743E46-A7B9-4B62-AD84-60CF4EC819C6}"/>
+                <a16:creationId xmlns:a16="http://schemas.microsoft.com/office/drawing/2014/main" id="{AD19625D-A4C1-4678-B689-FB7DAA70F304}"/>
               </a:ext>
             </a:extLst>
           </p:cNvPr>
@@ -4026,7 +4026,7 @@
           <p:cNvPr id="16" name="">
             <a:extLst xmlns:a="http://schemas.openxmlformats.org/drawingml/2006/main">
               <a:ext uri="{FF2B5EF4-FFF2-40B4-BE49-F238E27FC236}">
-                <a16:creationId xmlns:a16="http://schemas.microsoft.com/office/drawing/2014/main" id="{88836D59-6EAB-47A8-A69B-27FB4B11002C}"/>
+                <a16:creationId xmlns:a16="http://schemas.microsoft.com/office/drawing/2014/main" id="{8623F7A8-5EAA-443F-B403-EC461B09B639}"/>
               </a:ext>
             </a:extLst>
           </p:cNvPr>
@@ -4083,7 +4083,7 @@
           <p:cNvPr id="17" name="">
             <a:extLst xmlns:a="http://schemas.openxmlformats.org/drawingml/2006/main">
               <a:ext uri="{FF2B5EF4-FFF2-40B4-BE49-F238E27FC236}">
-                <a16:creationId xmlns:a16="http://schemas.microsoft.com/office/drawing/2014/main" id="{EEA8DF9C-629A-4724-BD11-58B258E1FE83}"/>
+                <a16:creationId xmlns:a16="http://schemas.microsoft.com/office/drawing/2014/main" id="{EF3BC755-5353-4969-8B36-2E6897355E3C}"/>
               </a:ext>
             </a:extLst>
           </p:cNvPr>
@@ -4140,7 +4140,7 @@
           <p:cNvPr id="18" name="">
             <a:extLst xmlns:a="http://schemas.openxmlformats.org/drawingml/2006/main">
               <a:ext uri="{FF2B5EF4-FFF2-40B4-BE49-F238E27FC236}">
-                <a16:creationId xmlns:a16="http://schemas.microsoft.com/office/drawing/2014/main" id="{69797C46-04EF-45D1-9D75-E1EC532D64D7}"/>
+                <a16:creationId xmlns:a16="http://schemas.microsoft.com/office/drawing/2014/main" id="{DC6A046C-8990-429B-9597-566898B4F286}"/>
               </a:ext>
             </a:extLst>
           </p:cNvPr>
@@ -4195,7 +4195,7 @@
     </p:spTree>
     <p:extLst>
       <p:ext uri="{BB962C8B-B14F-4D97-AF65-F5344CB8AC3E}">
-        <p14:creationId xmlns:p14="http://schemas.microsoft.com/office/powerpoint/2010/main" val="1599778034"/>
+        <p14:creationId xmlns:p14="http://schemas.microsoft.com/office/powerpoint/2010/main" val="787281261"/>
       </p:ext>
     </p:extLst>
   </p:cSld>
@@ -4350,7 +4350,7 @@
           <p:cNvPr id="23" name="">
             <a:extLst xmlns:a="http://schemas.openxmlformats.org/drawingml/2006/main">
               <a:ext uri="{FF2B5EF4-FFF2-40B4-BE49-F238E27FC236}">
-                <a16:creationId xmlns:a16="http://schemas.microsoft.com/office/drawing/2014/main" id="{DF3A6B83-4780-43A4-8C70-1AA47E3EB44A}"/>
+                <a16:creationId xmlns:a16="http://schemas.microsoft.com/office/drawing/2014/main" id="{573E1867-CAF2-4E46-AD98-2EBA75901398}"/>
               </a:ext>
             </a:extLst>
           </p:cNvPr>
@@ -4382,7 +4382,7 @@
           <p:cNvPr id="2" name="">
             <a:extLst xmlns:a="http://schemas.openxmlformats.org/drawingml/2006/main">
               <a:ext uri="{FF2B5EF4-FFF2-40B4-BE49-F238E27FC236}">
-                <a16:creationId xmlns:a16="http://schemas.microsoft.com/office/drawing/2014/main" id="{85C3C49F-3EA0-4598-BF79-05E857F1FA22}"/>
+                <a16:creationId xmlns:a16="http://schemas.microsoft.com/office/drawing/2014/main" id="{8337EB5F-EE04-4A56-841B-AE2A0C7C63C2}"/>
               </a:ext>
             </a:extLst>
           </p:cNvPr>
@@ -4439,7 +4439,7 @@
           <p:cNvPr id="3" name="">
             <a:extLst xmlns:a="http://schemas.openxmlformats.org/drawingml/2006/main">
               <a:ext uri="{FF2B5EF4-FFF2-40B4-BE49-F238E27FC236}">
-                <a16:creationId xmlns:a16="http://schemas.microsoft.com/office/drawing/2014/main" id="{6974CCC5-6B0F-45B1-A63B-15F9F2255D96}"/>
+                <a16:creationId xmlns:a16="http://schemas.microsoft.com/office/drawing/2014/main" id="{77B86C29-CE0A-45C8-A569-C67BD069DA38}"/>
               </a:ext>
             </a:extLst>
           </p:cNvPr>
@@ -4471,7 +4471,7 @@
           <p:cNvPr id="4" name="">
             <a:extLst xmlns:a="http://schemas.openxmlformats.org/drawingml/2006/main">
               <a:ext uri="{FF2B5EF4-FFF2-40B4-BE49-F238E27FC236}">
-                <a16:creationId xmlns:a16="http://schemas.microsoft.com/office/drawing/2014/main" id="{DDD3B72C-71A2-40F2-B485-710B9438F2F8}"/>
+                <a16:creationId xmlns:a16="http://schemas.microsoft.com/office/drawing/2014/main" id="{ED9E65F0-F5D2-490F-BB5D-C9D8E1E53793}"/>
               </a:ext>
             </a:extLst>
           </p:cNvPr>
@@ -4528,7 +4528,7 @@
           <p:cNvPr id="5" name="">
             <a:extLst xmlns:a="http://schemas.openxmlformats.org/drawingml/2006/main">
               <a:ext uri="{FF2B5EF4-FFF2-40B4-BE49-F238E27FC236}">
-                <a16:creationId xmlns:a16="http://schemas.microsoft.com/office/drawing/2014/main" id="{D73E261A-D099-45C1-8713-671B92300353}"/>
+                <a16:creationId xmlns:a16="http://schemas.microsoft.com/office/drawing/2014/main" id="{A9877F82-0326-4A5F-8260-7CA23E3D2BCA}"/>
               </a:ext>
             </a:extLst>
           </p:cNvPr>
@@ -4585,7 +4585,7 @@
           <p:cNvPr id="6" name="">
             <a:extLst xmlns:a="http://schemas.openxmlformats.org/drawingml/2006/main">
               <a:ext uri="{FF2B5EF4-FFF2-40B4-BE49-F238E27FC236}">
-                <a16:creationId xmlns:a16="http://schemas.microsoft.com/office/drawing/2014/main" id="{2AC34A9C-DD6C-4247-B500-58D6079B337E}"/>
+                <a16:creationId xmlns:a16="http://schemas.microsoft.com/office/drawing/2014/main" id="{30E3D7E7-18FA-45A1-A308-D4F938395D45}"/>
               </a:ext>
             </a:extLst>
           </p:cNvPr>
@@ -4642,7 +4642,7 @@
           <p:cNvPr id="7" name="">
             <a:extLst xmlns:a="http://schemas.openxmlformats.org/drawingml/2006/main">
               <a:ext uri="{FF2B5EF4-FFF2-40B4-BE49-F238E27FC236}">
-                <a16:creationId xmlns:a16="http://schemas.microsoft.com/office/drawing/2014/main" id="{9C6CD78A-5E4C-4E25-AD73-0BC454FC3A22}"/>
+                <a16:creationId xmlns:a16="http://schemas.microsoft.com/office/drawing/2014/main" id="{53AEFA74-5210-4540-9616-99FF71AE85D6}"/>
               </a:ext>
             </a:extLst>
           </p:cNvPr>
@@ -4674,7 +4674,7 @@
           <p:cNvPr id="8" name="">
             <a:extLst xmlns:a="http://schemas.openxmlformats.org/drawingml/2006/main">
               <a:ext uri="{FF2B5EF4-FFF2-40B4-BE49-F238E27FC236}">
-                <a16:creationId xmlns:a16="http://schemas.microsoft.com/office/drawing/2014/main" id="{A798EEE7-9B30-4901-8117-1477D76F07CA}"/>
+                <a16:creationId xmlns:a16="http://schemas.microsoft.com/office/drawing/2014/main" id="{31E2471D-FC5F-4C9B-8E1C-C4AAABFEF476}"/>
               </a:ext>
             </a:extLst>
           </p:cNvPr>
@@ -4731,7 +4731,7 @@
           <p:cNvPr id="9" name="">
             <a:extLst xmlns:a="http://schemas.openxmlformats.org/drawingml/2006/main">
               <a:ext uri="{FF2B5EF4-FFF2-40B4-BE49-F238E27FC236}">
-                <a16:creationId xmlns:a16="http://schemas.microsoft.com/office/drawing/2014/main" id="{92F7F3B7-FB7A-45DA-9D84-32C7CFE8FE79}"/>
+                <a16:creationId xmlns:a16="http://schemas.microsoft.com/office/drawing/2014/main" id="{9EA8AE8B-04DB-4766-8704-2A665D7CDE14}"/>
               </a:ext>
             </a:extLst>
           </p:cNvPr>
@@ -4788,7 +4788,7 @@
           <p:cNvPr id="10" name="">
             <a:extLst xmlns:a="http://schemas.openxmlformats.org/drawingml/2006/main">
               <a:ext uri="{FF2B5EF4-FFF2-40B4-BE49-F238E27FC236}">
-                <a16:creationId xmlns:a16="http://schemas.microsoft.com/office/drawing/2014/main" id="{075595DF-4B56-494F-A0E4-A8643649F492}"/>
+                <a16:creationId xmlns:a16="http://schemas.microsoft.com/office/drawing/2014/main" id="{8403F471-697F-48C2-BBD9-414BBE49842D}"/>
               </a:ext>
             </a:extLst>
           </p:cNvPr>
@@ -4822,7 +4822,7 @@
           <p:cNvPr id="11" name="">
             <a:extLst xmlns:a="http://schemas.openxmlformats.org/drawingml/2006/main">
               <a:ext uri="{FF2B5EF4-FFF2-40B4-BE49-F238E27FC236}">
-                <a16:creationId xmlns:a16="http://schemas.microsoft.com/office/drawing/2014/main" id="{11D03A3E-13CA-407A-8B7B-9DF5733D0600}"/>
+                <a16:creationId xmlns:a16="http://schemas.microsoft.com/office/drawing/2014/main" id="{DF147195-210C-4783-B80A-68FC457C76EA}"/>
               </a:ext>
             </a:extLst>
           </p:cNvPr>
@@ -4854,7 +4854,7 @@
           <p:cNvPr id="12" name="">
             <a:extLst xmlns:a="http://schemas.openxmlformats.org/drawingml/2006/main">
               <a:ext uri="{FF2B5EF4-FFF2-40B4-BE49-F238E27FC236}">
-                <a16:creationId xmlns:a16="http://schemas.microsoft.com/office/drawing/2014/main" id="{1CE72BAC-7CB6-41AA-9F5E-6DEFCDDFCA5C}"/>
+                <a16:creationId xmlns:a16="http://schemas.microsoft.com/office/drawing/2014/main" id="{7E0D510F-2FEF-4E82-9FBF-4749CFAD706C}"/>
               </a:ext>
             </a:extLst>
           </p:cNvPr>
@@ -4911,7 +4911,7 @@
           <p:cNvPr id="13" name="">
             <a:extLst xmlns:a="http://schemas.openxmlformats.org/drawingml/2006/main">
               <a:ext uri="{FF2B5EF4-FFF2-40B4-BE49-F238E27FC236}">
-                <a16:creationId xmlns:a16="http://schemas.microsoft.com/office/drawing/2014/main" id="{C2E6202C-4E8A-4C0A-B813-815CC4C2C065}"/>
+                <a16:creationId xmlns:a16="http://schemas.microsoft.com/office/drawing/2014/main" id="{4F4F3B60-8215-4EB9-945F-4B66F38C290F}"/>
               </a:ext>
             </a:extLst>
           </p:cNvPr>
@@ -4968,7 +4968,7 @@
           <p:cNvPr id="14" name="">
             <a:extLst xmlns:a="http://schemas.openxmlformats.org/drawingml/2006/main">
               <a:ext uri="{FF2B5EF4-FFF2-40B4-BE49-F238E27FC236}">
-                <a16:creationId xmlns:a16="http://schemas.microsoft.com/office/drawing/2014/main" id="{5A5C102B-36B5-404B-A31E-EC33FCB06AEE}"/>
+                <a16:creationId xmlns:a16="http://schemas.microsoft.com/office/drawing/2014/main" id="{2A7EE2FB-4ECF-4C30-9A41-339CB2DFAC44}"/>
               </a:ext>
             </a:extLst>
           </p:cNvPr>
@@ -5002,7 +5002,7 @@
           <p:cNvPr id="15" name="">
             <a:extLst xmlns:a="http://schemas.openxmlformats.org/drawingml/2006/main">
               <a:ext uri="{FF2B5EF4-FFF2-40B4-BE49-F238E27FC236}">
-                <a16:creationId xmlns:a16="http://schemas.microsoft.com/office/drawing/2014/main" id="{F40EBE1D-C6FA-40A2-B424-8E56AFB03E03}"/>
+                <a16:creationId xmlns:a16="http://schemas.microsoft.com/office/drawing/2014/main" id="{65494C44-3614-4E61-AFA4-E63D1E63D45A}"/>
               </a:ext>
             </a:extLst>
           </p:cNvPr>
@@ -5034,7 +5034,7 @@
           <p:cNvPr id="16" name="">
             <a:extLst xmlns:a="http://schemas.openxmlformats.org/drawingml/2006/main">
               <a:ext uri="{FF2B5EF4-FFF2-40B4-BE49-F238E27FC236}">
-                <a16:creationId xmlns:a16="http://schemas.microsoft.com/office/drawing/2014/main" id="{D70E1E36-111C-4B56-AE2F-985F79BB9D82}"/>
+                <a16:creationId xmlns:a16="http://schemas.microsoft.com/office/drawing/2014/main" id="{0A17C4C5-5623-43F0-B8B4-BAED5A6269F2}"/>
               </a:ext>
             </a:extLst>
           </p:cNvPr>
@@ -5091,7 +5091,7 @@
           <p:cNvPr id="17" name="">
             <a:extLst xmlns:a="http://schemas.openxmlformats.org/drawingml/2006/main">
               <a:ext uri="{FF2B5EF4-FFF2-40B4-BE49-F238E27FC236}">
-                <a16:creationId xmlns:a16="http://schemas.microsoft.com/office/drawing/2014/main" id="{7B3C2810-4EB7-4F24-AA6D-CB9DFF00F53D}"/>
+                <a16:creationId xmlns:a16="http://schemas.microsoft.com/office/drawing/2014/main" id="{91467625-0030-4D12-9663-13EF37B973BD}"/>
               </a:ext>
             </a:extLst>
           </p:cNvPr>
@@ -5148,7 +5148,7 @@
           <p:cNvPr id="18" name="">
             <a:extLst xmlns:a="http://schemas.openxmlformats.org/drawingml/2006/main">
               <a:ext uri="{FF2B5EF4-FFF2-40B4-BE49-F238E27FC236}">
-                <a16:creationId xmlns:a16="http://schemas.microsoft.com/office/drawing/2014/main" id="{1BB5FF60-7CC5-4A21-B6B5-163BCFF8F253}"/>
+                <a16:creationId xmlns:a16="http://schemas.microsoft.com/office/drawing/2014/main" id="{0D0A40BE-1B65-4BBF-A82B-58F7D5989E7A}"/>
               </a:ext>
             </a:extLst>
           </p:cNvPr>
@@ -5182,7 +5182,7 @@
           <p:cNvPr id="19" name="">
             <a:extLst xmlns:a="http://schemas.openxmlformats.org/drawingml/2006/main">
               <a:ext uri="{FF2B5EF4-FFF2-40B4-BE49-F238E27FC236}">
-                <a16:creationId xmlns:a16="http://schemas.microsoft.com/office/drawing/2014/main" id="{7083FBAE-BBA4-4EDC-906B-A6CC37FCF685}"/>
+                <a16:creationId xmlns:a16="http://schemas.microsoft.com/office/drawing/2014/main" id="{BFF2A79B-F550-4234-892A-EA0DC0FA7ED9}"/>
               </a:ext>
             </a:extLst>
           </p:cNvPr>
@@ -5214,7 +5214,7 @@
           <p:cNvPr id="20" name="">
             <a:extLst xmlns:a="http://schemas.openxmlformats.org/drawingml/2006/main">
               <a:ext uri="{FF2B5EF4-FFF2-40B4-BE49-F238E27FC236}">
-                <a16:creationId xmlns:a16="http://schemas.microsoft.com/office/drawing/2014/main" id="{2202BAD5-202B-4183-A431-80D08F7C8EB5}"/>
+                <a16:creationId xmlns:a16="http://schemas.microsoft.com/office/drawing/2014/main" id="{7A94BAB5-84F7-40E8-B07D-E984341AB320}"/>
               </a:ext>
             </a:extLst>
           </p:cNvPr>
@@ -5271,7 +5271,7 @@
           <p:cNvPr id="21" name="">
             <a:extLst xmlns:a="http://schemas.openxmlformats.org/drawingml/2006/main">
               <a:ext uri="{FF2B5EF4-FFF2-40B4-BE49-F238E27FC236}">
-                <a16:creationId xmlns:a16="http://schemas.microsoft.com/office/drawing/2014/main" id="{FABF42F2-6463-4741-BF3D-651214D9538B}"/>
+                <a16:creationId xmlns:a16="http://schemas.microsoft.com/office/drawing/2014/main" id="{0E34EDBB-9E6C-4406-A88A-274555B768FF}"/>
               </a:ext>
             </a:extLst>
           </p:cNvPr>
@@ -5328,7 +5328,7 @@
           <p:cNvPr id="22" name="">
             <a:extLst xmlns:a="http://schemas.openxmlformats.org/drawingml/2006/main">
               <a:ext uri="{FF2B5EF4-FFF2-40B4-BE49-F238E27FC236}">
-                <a16:creationId xmlns:a16="http://schemas.microsoft.com/office/drawing/2014/main" id="{40CFD687-F847-44ED-932D-C231C350AC31}"/>
+                <a16:creationId xmlns:a16="http://schemas.microsoft.com/office/drawing/2014/main" id="{FF4E9BD8-DC8A-4FD5-95E1-A3BE5C3DFA42}"/>
               </a:ext>
             </a:extLst>
           </p:cNvPr>
@@ -5383,7 +5383,7 @@
     </p:spTree>
     <p:extLst>
       <p:ext uri="{BB962C8B-B14F-4D97-AF65-F5344CB8AC3E}">
-        <p14:creationId xmlns:p14="http://schemas.microsoft.com/office/powerpoint/2010/main" val="1902141441"/>
+        <p14:creationId xmlns:p14="http://schemas.microsoft.com/office/powerpoint/2010/main" val="1706491820"/>
       </p:ext>
     </p:extLst>
   </p:cSld>
@@ -5584,7 +5584,7 @@
           <p:cNvPr id="23" name="">
             <a:extLst xmlns:a="http://schemas.openxmlformats.org/drawingml/2006/main">
               <a:ext uri="{FF2B5EF4-FFF2-40B4-BE49-F238E27FC236}">
-                <a16:creationId xmlns:a16="http://schemas.microsoft.com/office/drawing/2014/main" id="{9CF88F53-DAC7-4DC0-8D55-C706E15F6195}"/>
+                <a16:creationId xmlns:a16="http://schemas.microsoft.com/office/drawing/2014/main" id="{851CD232-A834-4CD7-A093-620E30B65A68}"/>
               </a:ext>
             </a:extLst>
           </p:cNvPr>
@@ -5616,7 +5616,7 @@
           <p:cNvPr id="2" name="">
             <a:extLst xmlns:a="http://schemas.openxmlformats.org/drawingml/2006/main">
               <a:ext uri="{FF2B5EF4-FFF2-40B4-BE49-F238E27FC236}">
-                <a16:creationId xmlns:a16="http://schemas.microsoft.com/office/drawing/2014/main" id="{B5C72D1B-EDE8-4FF8-9199-E2B95A7046BC}"/>
+                <a16:creationId xmlns:a16="http://schemas.microsoft.com/office/drawing/2014/main" id="{017139B7-3F41-40D9-A793-C41F1743A6F3}"/>
               </a:ext>
             </a:extLst>
           </p:cNvPr>
@@ -5673,7 +5673,7 @@
           <p:cNvPr id="3" name="">
             <a:extLst xmlns:a="http://schemas.openxmlformats.org/drawingml/2006/main">
               <a:ext uri="{FF2B5EF4-FFF2-40B4-BE49-F238E27FC236}">
-                <a16:creationId xmlns:a16="http://schemas.microsoft.com/office/drawing/2014/main" id="{6B28884D-9BDC-4E55-8978-5AB20DC7108C}"/>
+                <a16:creationId xmlns:a16="http://schemas.microsoft.com/office/drawing/2014/main" id="{34F40921-2DF9-4162-8A8F-C600D7D75A2D}"/>
               </a:ext>
             </a:extLst>
           </p:cNvPr>
@@ -5705,7 +5705,7 @@
           <p:cNvPr id="4" name="">
             <a:extLst xmlns:a="http://schemas.openxmlformats.org/drawingml/2006/main">
               <a:ext uri="{FF2B5EF4-FFF2-40B4-BE49-F238E27FC236}">
-                <a16:creationId xmlns:a16="http://schemas.microsoft.com/office/drawing/2014/main" id="{D448C90E-EA61-4957-B7C5-4967CA680E7C}"/>
+                <a16:creationId xmlns:a16="http://schemas.microsoft.com/office/drawing/2014/main" id="{68C8AA35-8928-456B-BFB9-84758B3E2D5C}"/>
               </a:ext>
             </a:extLst>
           </p:cNvPr>
@@ -5762,7 +5762,7 @@
           <p:cNvPr id="5" name="">
             <a:extLst xmlns:a="http://schemas.openxmlformats.org/drawingml/2006/main">
               <a:ext uri="{FF2B5EF4-FFF2-40B4-BE49-F238E27FC236}">
-                <a16:creationId xmlns:a16="http://schemas.microsoft.com/office/drawing/2014/main" id="{5A72786E-1224-4CE1-821E-386D4EA101C8}"/>
+                <a16:creationId xmlns:a16="http://schemas.microsoft.com/office/drawing/2014/main" id="{9D604FE9-43E8-447E-AEA5-495ED7FF80DC}"/>
               </a:ext>
             </a:extLst>
           </p:cNvPr>
@@ -5819,7 +5819,7 @@
           <p:cNvPr id="6" name="">
             <a:extLst xmlns:a="http://schemas.openxmlformats.org/drawingml/2006/main">
               <a:ext uri="{FF2B5EF4-FFF2-40B4-BE49-F238E27FC236}">
-                <a16:creationId xmlns:a16="http://schemas.microsoft.com/office/drawing/2014/main" id="{8BF23EA2-9D69-4D30-A181-746F6CDF4AE4}"/>
+                <a16:creationId xmlns:a16="http://schemas.microsoft.com/office/drawing/2014/main" id="{35C413C5-21E8-48AA-9D58-C396B5C988E8}"/>
               </a:ext>
             </a:extLst>
           </p:cNvPr>
@@ -5876,7 +5876,7 @@
           <p:cNvPr id="7" name="">
             <a:extLst xmlns:a="http://schemas.openxmlformats.org/drawingml/2006/main">
               <a:ext uri="{FF2B5EF4-FFF2-40B4-BE49-F238E27FC236}">
-                <a16:creationId xmlns:a16="http://schemas.microsoft.com/office/drawing/2014/main" id="{AC2FB317-EA67-4E02-8737-7B4E98741886}"/>
+                <a16:creationId xmlns:a16="http://schemas.microsoft.com/office/drawing/2014/main" id="{5BE26D0F-9B20-4828-8604-ABD8E395DBB7}"/>
               </a:ext>
             </a:extLst>
           </p:cNvPr>
@@ -5908,7 +5908,7 @@
           <p:cNvPr id="8" name="">
             <a:extLst xmlns:a="http://schemas.openxmlformats.org/drawingml/2006/main">
               <a:ext uri="{FF2B5EF4-FFF2-40B4-BE49-F238E27FC236}">
-                <a16:creationId xmlns:a16="http://schemas.microsoft.com/office/drawing/2014/main" id="{81E45A17-8924-414A-B2BF-9B263ED64B72}"/>
+                <a16:creationId xmlns:a16="http://schemas.microsoft.com/office/drawing/2014/main" id="{F39B3844-A4F6-4421-B737-805137A39A65}"/>
               </a:ext>
             </a:extLst>
           </p:cNvPr>
@@ -5965,7 +5965,7 @@
           <p:cNvPr id="9" name="">
             <a:extLst xmlns:a="http://schemas.openxmlformats.org/drawingml/2006/main">
               <a:ext uri="{FF2B5EF4-FFF2-40B4-BE49-F238E27FC236}">
-                <a16:creationId xmlns:a16="http://schemas.microsoft.com/office/drawing/2014/main" id="{5FC268ED-DBB6-49E1-80F7-3C12548F95AB}"/>
+                <a16:creationId xmlns:a16="http://schemas.microsoft.com/office/drawing/2014/main" id="{16924283-B3CE-41CD-AD9C-168BBBFA4507}"/>
               </a:ext>
             </a:extLst>
           </p:cNvPr>
@@ -6022,7 +6022,7 @@
           <p:cNvPr id="10" name="">
             <a:extLst xmlns:a="http://schemas.openxmlformats.org/drawingml/2006/main">
               <a:ext uri="{FF2B5EF4-FFF2-40B4-BE49-F238E27FC236}">
-                <a16:creationId xmlns:a16="http://schemas.microsoft.com/office/drawing/2014/main" id="{5CA65D11-FEE1-4281-82EE-98E85D102046}"/>
+                <a16:creationId xmlns:a16="http://schemas.microsoft.com/office/drawing/2014/main" id="{0BCABFE3-2FAB-4627-A9B9-D232F7D87BE6}"/>
               </a:ext>
             </a:extLst>
           </p:cNvPr>
@@ -6056,7 +6056,7 @@
           <p:cNvPr id="11" name="">
             <a:extLst xmlns:a="http://schemas.openxmlformats.org/drawingml/2006/main">
               <a:ext uri="{FF2B5EF4-FFF2-40B4-BE49-F238E27FC236}">
-                <a16:creationId xmlns:a16="http://schemas.microsoft.com/office/drawing/2014/main" id="{9AE0EC88-7AA4-42CC-998A-FDB6A617FC29}"/>
+                <a16:creationId xmlns:a16="http://schemas.microsoft.com/office/drawing/2014/main" id="{7E7DD4DE-3A8E-4A1D-B314-E9B7DA3EE97B}"/>
               </a:ext>
             </a:extLst>
           </p:cNvPr>
@@ -6088,7 +6088,7 @@
           <p:cNvPr id="12" name="">
             <a:extLst xmlns:a="http://schemas.openxmlformats.org/drawingml/2006/main">
               <a:ext uri="{FF2B5EF4-FFF2-40B4-BE49-F238E27FC236}">
-                <a16:creationId xmlns:a16="http://schemas.microsoft.com/office/drawing/2014/main" id="{9B2BECBE-9ABC-46AD-9DBF-D62E45BF5473}"/>
+                <a16:creationId xmlns:a16="http://schemas.microsoft.com/office/drawing/2014/main" id="{EF76B654-11E1-460D-8253-F0523BB8BE3A}"/>
               </a:ext>
             </a:extLst>
           </p:cNvPr>
@@ -6145,7 +6145,7 @@
           <p:cNvPr id="13" name="">
             <a:extLst xmlns:a="http://schemas.openxmlformats.org/drawingml/2006/main">
               <a:ext uri="{FF2B5EF4-FFF2-40B4-BE49-F238E27FC236}">
-                <a16:creationId xmlns:a16="http://schemas.microsoft.com/office/drawing/2014/main" id="{62A665D1-9A9B-4F16-8C5B-CD7A26EB1EF9}"/>
+                <a16:creationId xmlns:a16="http://schemas.microsoft.com/office/drawing/2014/main" id="{4294F727-7D52-421E-9D34-9AB9D94DEBF4}"/>
               </a:ext>
             </a:extLst>
           </p:cNvPr>
@@ -6202,7 +6202,7 @@
           <p:cNvPr id="14" name="">
             <a:extLst xmlns:a="http://schemas.openxmlformats.org/drawingml/2006/main">
               <a:ext uri="{FF2B5EF4-FFF2-40B4-BE49-F238E27FC236}">
-                <a16:creationId xmlns:a16="http://schemas.microsoft.com/office/drawing/2014/main" id="{2012C4FA-A2B1-4161-BC19-125432AD1EB5}"/>
+                <a16:creationId xmlns:a16="http://schemas.microsoft.com/office/drawing/2014/main" id="{1B3C44C8-ECF0-42D0-BBB8-D990347B78E2}"/>
               </a:ext>
             </a:extLst>
           </p:cNvPr>
@@ -6236,7 +6236,7 @@
           <p:cNvPr id="15" name="">
             <a:extLst xmlns:a="http://schemas.openxmlformats.org/drawingml/2006/main">
               <a:ext uri="{FF2B5EF4-FFF2-40B4-BE49-F238E27FC236}">
-                <a16:creationId xmlns:a16="http://schemas.microsoft.com/office/drawing/2014/main" id="{BD3171D2-7069-4F77-99A3-2FFBEB543AC9}"/>
+                <a16:creationId xmlns:a16="http://schemas.microsoft.com/office/drawing/2014/main" id="{B4FA1FE7-FE9F-48F7-873E-85C909058D6C}"/>
               </a:ext>
             </a:extLst>
           </p:cNvPr>
@@ -6268,7 +6268,7 @@
           <p:cNvPr id="16" name="">
             <a:extLst xmlns:a="http://schemas.openxmlformats.org/drawingml/2006/main">
               <a:ext uri="{FF2B5EF4-FFF2-40B4-BE49-F238E27FC236}">
-                <a16:creationId xmlns:a16="http://schemas.microsoft.com/office/drawing/2014/main" id="{47D5DC8F-771F-4A03-97BF-4D333FFC5CAC}"/>
+                <a16:creationId xmlns:a16="http://schemas.microsoft.com/office/drawing/2014/main" id="{489DBC84-1D62-49A8-9758-286D1FA481D9}"/>
               </a:ext>
             </a:extLst>
           </p:cNvPr>
@@ -6325,7 +6325,7 @@
           <p:cNvPr id="17" name="">
             <a:extLst xmlns:a="http://schemas.openxmlformats.org/drawingml/2006/main">
               <a:ext uri="{FF2B5EF4-FFF2-40B4-BE49-F238E27FC236}">
-                <a16:creationId xmlns:a16="http://schemas.microsoft.com/office/drawing/2014/main" id="{6AA3636B-A8CD-45E2-B5C7-791FBB9731C9}"/>
+                <a16:creationId xmlns:a16="http://schemas.microsoft.com/office/drawing/2014/main" id="{8DDAAE1C-4BFE-4155-8ABA-D426AC78E484}"/>
               </a:ext>
             </a:extLst>
           </p:cNvPr>
@@ -6382,7 +6382,7 @@
           <p:cNvPr id="18" name="">
             <a:extLst xmlns:a="http://schemas.openxmlformats.org/drawingml/2006/main">
               <a:ext uri="{FF2B5EF4-FFF2-40B4-BE49-F238E27FC236}">
-                <a16:creationId xmlns:a16="http://schemas.microsoft.com/office/drawing/2014/main" id="{21A3970F-86F9-4EA7-B37A-35911DD7BED7}"/>
+                <a16:creationId xmlns:a16="http://schemas.microsoft.com/office/drawing/2014/main" id="{CEF626D1-7D2D-46E3-B439-88ED1C5D1CA6}"/>
               </a:ext>
             </a:extLst>
           </p:cNvPr>
@@ -6416,7 +6416,7 @@
           <p:cNvPr id="19" name="">
             <a:extLst xmlns:a="http://schemas.openxmlformats.org/drawingml/2006/main">
               <a:ext uri="{FF2B5EF4-FFF2-40B4-BE49-F238E27FC236}">
-                <a16:creationId xmlns:a16="http://schemas.microsoft.com/office/drawing/2014/main" id="{2C257818-1186-4A0E-A139-98088D11BA7B}"/>
+                <a16:creationId xmlns:a16="http://schemas.microsoft.com/office/drawing/2014/main" id="{E84ADA15-231E-4DD5-845F-56E3DB2941EF}"/>
               </a:ext>
             </a:extLst>
           </p:cNvPr>
@@ -6448,7 +6448,7 @@
           <p:cNvPr id="20" name="">
             <a:extLst xmlns:a="http://schemas.openxmlformats.org/drawingml/2006/main">
               <a:ext uri="{FF2B5EF4-FFF2-40B4-BE49-F238E27FC236}">
-                <a16:creationId xmlns:a16="http://schemas.microsoft.com/office/drawing/2014/main" id="{38E73868-DE5B-4DF4-8CF9-CC8E51529338}"/>
+                <a16:creationId xmlns:a16="http://schemas.microsoft.com/office/drawing/2014/main" id="{84C1F831-9074-49E8-9EF1-BF8510F781AD}"/>
               </a:ext>
             </a:extLst>
           </p:cNvPr>
@@ -6505,7 +6505,7 @@
           <p:cNvPr id="21" name="">
             <a:extLst xmlns:a="http://schemas.openxmlformats.org/drawingml/2006/main">
               <a:ext uri="{FF2B5EF4-FFF2-40B4-BE49-F238E27FC236}">
-                <a16:creationId xmlns:a16="http://schemas.microsoft.com/office/drawing/2014/main" id="{9A7E26C4-BE3A-48E8-9976-DD6B8BCB0C62}"/>
+                <a16:creationId xmlns:a16="http://schemas.microsoft.com/office/drawing/2014/main" id="{3A69BE2D-A7D1-4F45-8694-1CE66319E5C6}"/>
               </a:ext>
             </a:extLst>
           </p:cNvPr>
@@ -6562,7 +6562,7 @@
           <p:cNvPr id="22" name="">
             <a:extLst xmlns:a="http://schemas.openxmlformats.org/drawingml/2006/main">
               <a:ext uri="{FF2B5EF4-FFF2-40B4-BE49-F238E27FC236}">
-                <a16:creationId xmlns:a16="http://schemas.microsoft.com/office/drawing/2014/main" id="{955E6323-48EF-463F-A8D1-A17323B6FA85}"/>
+                <a16:creationId xmlns:a16="http://schemas.microsoft.com/office/drawing/2014/main" id="{27E1343D-4D49-4ADD-A7C4-F2B5153AF7E5}"/>
               </a:ext>
             </a:extLst>
           </p:cNvPr>
@@ -6617,7 +6617,7 @@
     </p:spTree>
     <p:extLst>
       <p:ext uri="{BB962C8B-B14F-4D97-AF65-F5344CB8AC3E}">
-        <p14:creationId xmlns:p14="http://schemas.microsoft.com/office/powerpoint/2010/main" val="755944788"/>
+        <p14:creationId xmlns:p14="http://schemas.microsoft.com/office/powerpoint/2010/main" val="776273038"/>
       </p:ext>
     </p:extLst>
   </p:cSld>
@@ -6818,7 +6818,7 @@
           <p:cNvPr id="16" name="">
             <a:extLst xmlns:a="http://schemas.openxmlformats.org/drawingml/2006/main">
               <a:ext uri="{FF2B5EF4-FFF2-40B4-BE49-F238E27FC236}">
-                <a16:creationId xmlns:a16="http://schemas.microsoft.com/office/drawing/2014/main" id="{396F4CF3-085B-4840-845D-A85907C36B79}"/>
+                <a16:creationId xmlns:a16="http://schemas.microsoft.com/office/drawing/2014/main" id="{C6F32ED4-5361-4EE4-9EC5-F9C8991047EA}"/>
               </a:ext>
             </a:extLst>
           </p:cNvPr>
@@ -6850,7 +6850,7 @@
           <p:cNvPr id="2" name="">
             <a:extLst xmlns:a="http://schemas.openxmlformats.org/drawingml/2006/main">
               <a:ext uri="{FF2B5EF4-FFF2-40B4-BE49-F238E27FC236}">
-                <a16:creationId xmlns:a16="http://schemas.microsoft.com/office/drawing/2014/main" id="{8B397D5A-CE9E-4C6E-AEDB-D0CA117535A4}"/>
+                <a16:creationId xmlns:a16="http://schemas.microsoft.com/office/drawing/2014/main" id="{2C95DCF0-938C-49FE-887E-30E32637DB97}"/>
               </a:ext>
             </a:extLst>
           </p:cNvPr>
@@ -6907,7 +6907,7 @@
           <p:cNvPr id="3" name="">
             <a:extLst xmlns:a="http://schemas.openxmlformats.org/drawingml/2006/main">
               <a:ext uri="{FF2B5EF4-FFF2-40B4-BE49-F238E27FC236}">
-                <a16:creationId xmlns:a16="http://schemas.microsoft.com/office/drawing/2014/main" id="{33D1373E-D771-4F6C-82D5-EBCB3CCADC5C}"/>
+                <a16:creationId xmlns:a16="http://schemas.microsoft.com/office/drawing/2014/main" id="{454D9134-2095-4D63-BEDF-F7C9ACCC0AA8}"/>
               </a:ext>
             </a:extLst>
           </p:cNvPr>
@@ -6939,7 +6939,7 @@
           <p:cNvPr id="4" name="">
             <a:extLst xmlns:a="http://schemas.openxmlformats.org/drawingml/2006/main">
               <a:ext uri="{FF2B5EF4-FFF2-40B4-BE49-F238E27FC236}">
-                <a16:creationId xmlns:a16="http://schemas.microsoft.com/office/drawing/2014/main" id="{58B8CBCB-9884-4A07-9AF5-9B58BB0C751F}"/>
+                <a16:creationId xmlns:a16="http://schemas.microsoft.com/office/drawing/2014/main" id="{8C90B26F-0984-4733-BA74-FA6286A80E49}"/>
               </a:ext>
             </a:extLst>
           </p:cNvPr>
@@ -6996,7 +6996,7 @@
           <p:cNvPr id="5" name="">
             <a:extLst xmlns:a="http://schemas.openxmlformats.org/drawingml/2006/main">
               <a:ext uri="{FF2B5EF4-FFF2-40B4-BE49-F238E27FC236}">
-                <a16:creationId xmlns:a16="http://schemas.microsoft.com/office/drawing/2014/main" id="{0E441771-37E6-41AA-893C-29197EE635ED}"/>
+                <a16:creationId xmlns:a16="http://schemas.microsoft.com/office/drawing/2014/main" id="{79BAAF29-C9FD-43AF-A04F-CC6F969FF805}"/>
               </a:ext>
             </a:extLst>
           </p:cNvPr>
@@ -7053,7 +7053,7 @@
           <p:cNvPr id="6" name="">
             <a:extLst xmlns:a="http://schemas.openxmlformats.org/drawingml/2006/main">
               <a:ext uri="{FF2B5EF4-FFF2-40B4-BE49-F238E27FC236}">
-                <a16:creationId xmlns:a16="http://schemas.microsoft.com/office/drawing/2014/main" id="{B78572F4-1468-45D0-804F-4AFAE8C68750}"/>
+                <a16:creationId xmlns:a16="http://schemas.microsoft.com/office/drawing/2014/main" id="{5794AB6B-6B3D-417B-913C-A1CFA6502534}"/>
               </a:ext>
             </a:extLst>
           </p:cNvPr>
@@ -7110,7 +7110,7 @@
           <p:cNvPr id="7" name="">
             <a:extLst xmlns:a="http://schemas.openxmlformats.org/drawingml/2006/main">
               <a:ext uri="{FF2B5EF4-FFF2-40B4-BE49-F238E27FC236}">
-                <a16:creationId xmlns:a16="http://schemas.microsoft.com/office/drawing/2014/main" id="{93211484-C2CE-478B-A7A8-E05778AFE629}"/>
+                <a16:creationId xmlns:a16="http://schemas.microsoft.com/office/drawing/2014/main" id="{0BA0C7C7-A040-4BCB-98E4-255C1DFFD708}"/>
               </a:ext>
             </a:extLst>
           </p:cNvPr>
@@ -7142,7 +7142,7 @@
           <p:cNvPr id="8" name="">
             <a:extLst xmlns:a="http://schemas.openxmlformats.org/drawingml/2006/main">
               <a:ext uri="{FF2B5EF4-FFF2-40B4-BE49-F238E27FC236}">
-                <a16:creationId xmlns:a16="http://schemas.microsoft.com/office/drawing/2014/main" id="{C9D076C6-C57E-4E0A-913C-6C83133BAE10}"/>
+                <a16:creationId xmlns:a16="http://schemas.microsoft.com/office/drawing/2014/main" id="{803A8D27-26A1-4F55-9D19-C474B2D4F47E}"/>
               </a:ext>
             </a:extLst>
           </p:cNvPr>
@@ -7199,7 +7199,7 @@
           <p:cNvPr id="9" name="">
             <a:extLst xmlns:a="http://schemas.openxmlformats.org/drawingml/2006/main">
               <a:ext uri="{FF2B5EF4-FFF2-40B4-BE49-F238E27FC236}">
-                <a16:creationId xmlns:a16="http://schemas.microsoft.com/office/drawing/2014/main" id="{C2826DD3-0D43-476B-A2D9-30FBE8E5E6F1}"/>
+                <a16:creationId xmlns:a16="http://schemas.microsoft.com/office/drawing/2014/main" id="{C4FAF176-77DC-4BB0-8D92-66DA0B7F865C}"/>
               </a:ext>
             </a:extLst>
           </p:cNvPr>
@@ -7256,7 +7256,7 @@
           <p:cNvPr id="10" name="">
             <a:extLst xmlns:a="http://schemas.openxmlformats.org/drawingml/2006/main">
               <a:ext uri="{FF2B5EF4-FFF2-40B4-BE49-F238E27FC236}">
-                <a16:creationId xmlns:a16="http://schemas.microsoft.com/office/drawing/2014/main" id="{FC0667D5-DD49-4A57-82FF-8756EB956565}"/>
+                <a16:creationId xmlns:a16="http://schemas.microsoft.com/office/drawing/2014/main" id="{5E00727F-A1AF-4910-A614-D227E9F969A3}"/>
               </a:ext>
             </a:extLst>
           </p:cNvPr>
@@ -7313,7 +7313,7 @@
           <p:cNvPr id="11" name="">
             <a:extLst xmlns:a="http://schemas.openxmlformats.org/drawingml/2006/main">
               <a:ext uri="{FF2B5EF4-FFF2-40B4-BE49-F238E27FC236}">
-                <a16:creationId xmlns:a16="http://schemas.microsoft.com/office/drawing/2014/main" id="{04102EC9-5128-4099-88D5-D9E0760A413A}"/>
+                <a16:creationId xmlns:a16="http://schemas.microsoft.com/office/drawing/2014/main" id="{DDA01C13-C6BB-4D35-8F03-9CAF7133595F}"/>
               </a:ext>
             </a:extLst>
           </p:cNvPr>
@@ -7345,7 +7345,7 @@
           <p:cNvPr id="12" name="">
             <a:extLst xmlns:a="http://schemas.openxmlformats.org/drawingml/2006/main">
               <a:ext uri="{FF2B5EF4-FFF2-40B4-BE49-F238E27FC236}">
-                <a16:creationId xmlns:a16="http://schemas.microsoft.com/office/drawing/2014/main" id="{25710451-93AF-4156-8D92-C2867EBD2162}"/>
+                <a16:creationId xmlns:a16="http://schemas.microsoft.com/office/drawing/2014/main" id="{B1A1A2AA-EAAE-44DB-A803-A98B8DDC77E5}"/>
               </a:ext>
             </a:extLst>
           </p:cNvPr>
@@ -7402,7 +7402,7 @@
           <p:cNvPr id="13" name="">
             <a:extLst xmlns:a="http://schemas.openxmlformats.org/drawingml/2006/main">
               <a:ext uri="{FF2B5EF4-FFF2-40B4-BE49-F238E27FC236}">
-                <a16:creationId xmlns:a16="http://schemas.microsoft.com/office/drawing/2014/main" id="{7698FFE2-6B9C-4E61-8C52-738344C4E338}"/>
+                <a16:creationId xmlns:a16="http://schemas.microsoft.com/office/drawing/2014/main" id="{D85D13C2-E4F1-4CF7-9036-0830B182A9AA}"/>
               </a:ext>
             </a:extLst>
           </p:cNvPr>
@@ -7459,7 +7459,7 @@
           <p:cNvPr id="14" name="">
             <a:extLst xmlns:a="http://schemas.openxmlformats.org/drawingml/2006/main">
               <a:ext uri="{FF2B5EF4-FFF2-40B4-BE49-F238E27FC236}">
-                <a16:creationId xmlns:a16="http://schemas.microsoft.com/office/drawing/2014/main" id="{E9A44D1B-D06A-4EA8-A4A3-3AAA1CE694E8}"/>
+                <a16:creationId xmlns:a16="http://schemas.microsoft.com/office/drawing/2014/main" id="{AB67E92F-B9DD-4040-A030-75EC403DED3A}"/>
               </a:ext>
             </a:extLst>
           </p:cNvPr>
@@ -7516,7 +7516,7 @@
           <p:cNvPr id="15" name="">
             <a:extLst xmlns:a="http://schemas.openxmlformats.org/drawingml/2006/main">
               <a:ext uri="{FF2B5EF4-FFF2-40B4-BE49-F238E27FC236}">
-                <a16:creationId xmlns:a16="http://schemas.microsoft.com/office/drawing/2014/main" id="{7AC5FA48-08D1-4FAD-8EF7-3AEFA726DE51}"/>
+                <a16:creationId xmlns:a16="http://schemas.microsoft.com/office/drawing/2014/main" id="{9D3CEB80-393E-4D9C-A36D-2A2F1D4DBE7E}"/>
               </a:ext>
             </a:extLst>
           </p:cNvPr>
@@ -7571,7 +7571,7 @@
     </p:spTree>
     <p:extLst>
       <p:ext uri="{BB962C8B-B14F-4D97-AF65-F5344CB8AC3E}">
-        <p14:creationId xmlns:p14="http://schemas.microsoft.com/office/powerpoint/2010/main" val="1157349716"/>
+        <p14:creationId xmlns:p14="http://schemas.microsoft.com/office/powerpoint/2010/main" val="856387950"/>
       </p:ext>
     </p:extLst>
   </p:cSld>
@@ -7772,7 +7772,7 @@
           <p:cNvPr id="23" name="">
             <a:extLst xmlns:a="http://schemas.openxmlformats.org/drawingml/2006/main">
               <a:ext uri="{FF2B5EF4-FFF2-40B4-BE49-F238E27FC236}">
-                <a16:creationId xmlns:a16="http://schemas.microsoft.com/office/drawing/2014/main" id="{3FA9D8CB-9CF8-4436-920E-7364E4121104}"/>
+                <a16:creationId xmlns:a16="http://schemas.microsoft.com/office/drawing/2014/main" id="{73B73A1E-4800-49DD-977E-5E52A4B5797C}"/>
               </a:ext>
             </a:extLst>
           </p:cNvPr>
@@ -7804,7 +7804,7 @@
           <p:cNvPr id="2" name="">
             <a:extLst xmlns:a="http://schemas.openxmlformats.org/drawingml/2006/main">
               <a:ext uri="{FF2B5EF4-FFF2-40B4-BE49-F238E27FC236}">
-                <a16:creationId xmlns:a16="http://schemas.microsoft.com/office/drawing/2014/main" id="{F5BDAEF2-D395-484E-BAA3-753243572311}"/>
+                <a16:creationId xmlns:a16="http://schemas.microsoft.com/office/drawing/2014/main" id="{CFCF86A3-66B0-4598-932E-65C4E7717EFB}"/>
               </a:ext>
             </a:extLst>
           </p:cNvPr>
@@ -7861,7 +7861,7 @@
           <p:cNvPr id="3" name="">
             <a:extLst xmlns:a="http://schemas.openxmlformats.org/drawingml/2006/main">
               <a:ext uri="{FF2B5EF4-FFF2-40B4-BE49-F238E27FC236}">
-                <a16:creationId xmlns:a16="http://schemas.microsoft.com/office/drawing/2014/main" id="{81AD8130-064B-4E34-BBCE-E793BD549717}"/>
+                <a16:creationId xmlns:a16="http://schemas.microsoft.com/office/drawing/2014/main" id="{AAF8F7F3-02E2-4818-9F02-83D73C873E93}"/>
               </a:ext>
             </a:extLst>
           </p:cNvPr>
@@ -7893,7 +7893,7 @@
           <p:cNvPr id="4" name="">
             <a:extLst xmlns:a="http://schemas.openxmlformats.org/drawingml/2006/main">
               <a:ext uri="{FF2B5EF4-FFF2-40B4-BE49-F238E27FC236}">
-                <a16:creationId xmlns:a16="http://schemas.microsoft.com/office/drawing/2014/main" id="{D7441BED-342F-4651-BA92-FB7B9A27187C}"/>
+                <a16:creationId xmlns:a16="http://schemas.microsoft.com/office/drawing/2014/main" id="{542E87D7-02AE-43AD-9D4F-72E8FD427304}"/>
               </a:ext>
             </a:extLst>
           </p:cNvPr>
@@ -7950,7 +7950,7 @@
           <p:cNvPr id="5" name="">
             <a:extLst xmlns:a="http://schemas.openxmlformats.org/drawingml/2006/main">
               <a:ext uri="{FF2B5EF4-FFF2-40B4-BE49-F238E27FC236}">
-                <a16:creationId xmlns:a16="http://schemas.microsoft.com/office/drawing/2014/main" id="{BB91E33E-8CCE-48FA-87E8-EBFDFB82C821}"/>
+                <a16:creationId xmlns:a16="http://schemas.microsoft.com/office/drawing/2014/main" id="{FEFEAACE-D2F0-47AC-90B6-654B8DC41162}"/>
               </a:ext>
             </a:extLst>
           </p:cNvPr>
@@ -8007,7 +8007,7 @@
           <p:cNvPr id="6" name="">
             <a:extLst xmlns:a="http://schemas.openxmlformats.org/drawingml/2006/main">
               <a:ext uri="{FF2B5EF4-FFF2-40B4-BE49-F238E27FC236}">
-                <a16:creationId xmlns:a16="http://schemas.microsoft.com/office/drawing/2014/main" id="{9218291E-0B62-4D39-A702-380ECF77AB53}"/>
+                <a16:creationId xmlns:a16="http://schemas.microsoft.com/office/drawing/2014/main" id="{32E3C873-FDEB-4FD3-9F29-7792B2C75A7F}"/>
               </a:ext>
             </a:extLst>
           </p:cNvPr>
@@ -8064,7 +8064,7 @@
           <p:cNvPr id="7" name="">
             <a:extLst xmlns:a="http://schemas.openxmlformats.org/drawingml/2006/main">
               <a:ext uri="{FF2B5EF4-FFF2-40B4-BE49-F238E27FC236}">
-                <a16:creationId xmlns:a16="http://schemas.microsoft.com/office/drawing/2014/main" id="{BBD0B98F-134B-4B48-8EC8-78B9A63B0B46}"/>
+                <a16:creationId xmlns:a16="http://schemas.microsoft.com/office/drawing/2014/main" id="{4A7138DF-3A70-40F6-98B9-D66DD03F22A7}"/>
               </a:ext>
             </a:extLst>
           </p:cNvPr>
@@ -8096,7 +8096,7 @@
           <p:cNvPr id="8" name="">
             <a:extLst xmlns:a="http://schemas.openxmlformats.org/drawingml/2006/main">
               <a:ext uri="{FF2B5EF4-FFF2-40B4-BE49-F238E27FC236}">
-                <a16:creationId xmlns:a16="http://schemas.microsoft.com/office/drawing/2014/main" id="{C205FC4E-6CE7-4039-9557-A40D8851C329}"/>
+                <a16:creationId xmlns:a16="http://schemas.microsoft.com/office/drawing/2014/main" id="{CE1FA894-869F-417C-8C2A-FB7FBD49A7FE}"/>
               </a:ext>
             </a:extLst>
           </p:cNvPr>
@@ -8153,7 +8153,7 @@
           <p:cNvPr id="9" name="">
             <a:extLst xmlns:a="http://schemas.openxmlformats.org/drawingml/2006/main">
               <a:ext uri="{FF2B5EF4-FFF2-40B4-BE49-F238E27FC236}">
-                <a16:creationId xmlns:a16="http://schemas.microsoft.com/office/drawing/2014/main" id="{21C74136-55EF-42F9-80D6-C766EF7937B8}"/>
+                <a16:creationId xmlns:a16="http://schemas.microsoft.com/office/drawing/2014/main" id="{19DEE3CE-64DD-4184-8E96-D046C20ACF82}"/>
               </a:ext>
             </a:extLst>
           </p:cNvPr>
@@ -8210,19 +8210,19 @@
           <p:cNvPr id="10" name="">
             <a:extLst xmlns:a="http://schemas.openxmlformats.org/drawingml/2006/main">
               <a:ext uri="{FF2B5EF4-FFF2-40B4-BE49-F238E27FC236}">
-                <a16:creationId xmlns:a16="http://schemas.microsoft.com/office/drawing/2014/main" id="{0BC756F3-8106-4EC9-A519-60B9A7414D5F}"/>
-              </a:ext>
-            </a:extLst>
-          </p:cNvPr>
-          <p:cNvSpPr>
-            <a:spLocks xmlns:a="http://schemas.openxmlformats.org/drawingml/2006/main" noGrp="1"/>
-          </p:cNvSpPr>
-          <p:nvPr/>
-        </p:nvSpPr>
-        <p:spPr>
-          <a:xfrm xmlns:a="http://schemas.openxmlformats.org/drawingml/2006/main">
-            <a:off x="914400" y="1257300"/>
-            <a:ext cx="10363200" cy="781050"/>
+                <a16:creationId xmlns:a16="http://schemas.microsoft.com/office/drawing/2014/main" id="{74D44370-0A60-4AC7-B622-1D37DE7B1DF5}"/>
+              </a:ext>
+            </a:extLst>
+          </p:cNvPr>
+          <p:cNvSpPr>
+            <a:spLocks xmlns:a="http://schemas.openxmlformats.org/drawingml/2006/main" noGrp="1"/>
+          </p:cNvSpPr>
+          <p:nvPr/>
+        </p:nvSpPr>
+        <p:spPr>
+          <a:xfrm xmlns:a="http://schemas.openxmlformats.org/drawingml/2006/main">
+            <a:off x="857250" y="1219200"/>
+            <a:ext cx="10477500" cy="742950"/>
           </a:xfrm>
           <a:prstGeom xmlns:a="http://schemas.openxmlformats.org/drawingml/2006/main" prst="rect">
             <a:avLst/>
@@ -8239,7 +8239,7 @@
           <a:lstStyle xmlns:a="http://schemas.openxmlformats.org/drawingml/2006/main"/>
           <a:p xmlns:a="http://schemas.openxmlformats.org/drawingml/2006/main">
             <a:pPr algn="ctr">
-              <a:defRPr sz="2175" b="1">
+              <a:defRPr sz="2100" b="1">
                 <a:solidFill>
                   <a:srgbClr val="17253A"/>
                 </a:solidFill>
@@ -8249,7 +8249,7 @@
               </a:defRPr>
             </a:pPr>
             <a:r>
-              <a:rPr sz="2175" b="1">
+              <a:rPr sz="2100" b="1">
                 <a:solidFill>
                   <a:srgbClr val="17253A"/>
                 </a:solidFill>
@@ -8267,28 +8267,30 @@
           <p:cNvPr id="11" name="">
             <a:extLst xmlns:a="http://schemas.openxmlformats.org/drawingml/2006/main">
               <a:ext uri="{FF2B5EF4-FFF2-40B4-BE49-F238E27FC236}">
-                <a16:creationId xmlns:a16="http://schemas.microsoft.com/office/drawing/2014/main" id="{9F2C15D5-F31F-4903-99E7-60AED1AF5579}"/>
-              </a:ext>
-            </a:extLst>
-          </p:cNvPr>
-          <p:cNvSpPr>
-            <a:spLocks xmlns:a="http://schemas.openxmlformats.org/drawingml/2006/main" noGrp="1"/>
-          </p:cNvSpPr>
-          <p:nvPr/>
-        </p:nvSpPr>
-        <p:spPr>
-          <a:xfrm xmlns:a="http://schemas.openxmlformats.org/drawingml/2006/main">
-            <a:off x="1000125" y="2247900"/>
-            <a:ext cx="476250" cy="476250"/>
-          </a:xfrm>
-          <a:prstGeom xmlns:a="http://schemas.openxmlformats.org/drawingml/2006/main" prst="ellipse">
+                <a16:creationId xmlns:a16="http://schemas.microsoft.com/office/drawing/2014/main" id="{A36B1DBA-44ED-4BD8-9100-14E648EA194F}"/>
+              </a:ext>
+            </a:extLst>
+          </p:cNvPr>
+          <p:cNvSpPr>
+            <a:spLocks xmlns:a="http://schemas.openxmlformats.org/drawingml/2006/main" noGrp="1"/>
+          </p:cNvSpPr>
+          <p:nvPr/>
+        </p:nvSpPr>
+        <p:spPr>
+          <a:xfrm xmlns:a="http://schemas.openxmlformats.org/drawingml/2006/main">
+            <a:off x="971550" y="2124075"/>
+            <a:ext cx="38100" cy="3524250"/>
+          </a:xfrm>
+          <a:prstGeom xmlns:a="http://schemas.openxmlformats.org/drawingml/2006/main" prst="rect">
             <a:avLst/>
           </a:prstGeom>
           <a:solidFill xmlns:a="http://schemas.openxmlformats.org/drawingml/2006/main">
-            <a:srgbClr val="18324A"/>
+            <a:srgbClr val="2C6E73"/>
           </a:solidFill>
           <a:ln xmlns:a="http://schemas.openxmlformats.org/drawingml/2006/main" w="0">
-            <a:noFill/>
+            <a:solidFill>
+              <a:srgbClr val="2C6E73"/>
+            </a:solidFill>
           </a:ln>
         </p:spPr>
       </p:sp>
@@ -8297,19 +8299,19 @@
           <p:cNvPr id="12" name="">
             <a:extLst xmlns:a="http://schemas.openxmlformats.org/drawingml/2006/main">
               <a:ext uri="{FF2B5EF4-FFF2-40B4-BE49-F238E27FC236}">
-                <a16:creationId xmlns:a16="http://schemas.microsoft.com/office/drawing/2014/main" id="{2198E972-4047-4CF3-905C-12C2EB63F454}"/>
-              </a:ext>
-            </a:extLst>
-          </p:cNvPr>
-          <p:cNvSpPr>
-            <a:spLocks xmlns:a="http://schemas.openxmlformats.org/drawingml/2006/main" noGrp="1"/>
-          </p:cNvSpPr>
-          <p:nvPr/>
-        </p:nvSpPr>
-        <p:spPr>
-          <a:xfrm xmlns:a="http://schemas.openxmlformats.org/drawingml/2006/main">
-            <a:off x="1000125" y="2276475"/>
-            <a:ext cx="476250" cy="419100"/>
+                <a16:creationId xmlns:a16="http://schemas.microsoft.com/office/drawing/2014/main" id="{2D7BF74D-9BD0-4D5D-9C71-A0FD7A9695C7}"/>
+              </a:ext>
+            </a:extLst>
+          </p:cNvPr>
+          <p:cNvSpPr>
+            <a:spLocks xmlns:a="http://schemas.openxmlformats.org/drawingml/2006/main" noGrp="1"/>
+          </p:cNvSpPr>
+          <p:nvPr/>
+        </p:nvSpPr>
+        <p:spPr>
+          <a:xfrm xmlns:a="http://schemas.openxmlformats.org/drawingml/2006/main">
+            <a:off x="1162050" y="2200275"/>
+            <a:ext cx="400050" cy="400050"/>
           </a:xfrm>
           <a:prstGeom xmlns:a="http://schemas.openxmlformats.org/drawingml/2006/main" prst="rect">
             <a:avLst/>
@@ -8326,9 +8328,9 @@
           <a:lstStyle xmlns:a="http://schemas.openxmlformats.org/drawingml/2006/main"/>
           <a:p xmlns:a="http://schemas.openxmlformats.org/drawingml/2006/main">
             <a:pPr algn="ctr">
-              <a:defRPr sz="1350" b="1">
-                <a:solidFill>
-                  <a:srgbClr val="FFFFFF"/>
+              <a:defRPr sz="1125" b="1">
+                <a:solidFill>
+                  <a:srgbClr val="2C6E73"/>
                 </a:solidFill>
                 <a:latin typeface="Arial"/>
                 <a:ea typeface="Arial"/>
@@ -8336,9 +8338,9 @@
               </a:defRPr>
             </a:pPr>
             <a:r>
-              <a:rPr sz="1350" b="1">
-                <a:solidFill>
-                  <a:srgbClr val="FFFFFF"/>
+              <a:rPr sz="1125" b="1">
+                <a:solidFill>
+                  <a:srgbClr val="2C6E73"/>
                 </a:solidFill>
                 <a:latin typeface="Arial"/>
                 <a:ea typeface="Arial"/>
@@ -8354,19 +8356,19 @@
           <p:cNvPr id="13" name="">
             <a:extLst xmlns:a="http://schemas.openxmlformats.org/drawingml/2006/main">
               <a:ext uri="{FF2B5EF4-FFF2-40B4-BE49-F238E27FC236}">
-                <a16:creationId xmlns:a16="http://schemas.microsoft.com/office/drawing/2014/main" id="{27BEB594-B689-455C-A5E5-420F05813D2F}"/>
-              </a:ext>
-            </a:extLst>
-          </p:cNvPr>
-          <p:cNvSpPr>
-            <a:spLocks xmlns:a="http://schemas.openxmlformats.org/drawingml/2006/main" noGrp="1"/>
-          </p:cNvSpPr>
-          <p:nvPr/>
-        </p:nvSpPr>
-        <p:spPr>
-          <a:xfrm xmlns:a="http://schemas.openxmlformats.org/drawingml/2006/main">
-            <a:off x="1714500" y="2181225"/>
-            <a:ext cx="9429750" cy="609600"/>
+                <a16:creationId xmlns:a16="http://schemas.microsoft.com/office/drawing/2014/main" id="{25B48BEE-8610-4EA0-B588-D185B18D1B71}"/>
+              </a:ext>
+            </a:extLst>
+          </p:cNvPr>
+          <p:cNvSpPr>
+            <a:spLocks xmlns:a="http://schemas.openxmlformats.org/drawingml/2006/main" noGrp="1"/>
+          </p:cNvSpPr>
+          <p:nvPr/>
+        </p:nvSpPr>
+        <p:spPr>
+          <a:xfrm xmlns:a="http://schemas.openxmlformats.org/drawingml/2006/main">
+            <a:off x="1714500" y="2114550"/>
+            <a:ext cx="9525000" cy="809625"/>
           </a:xfrm>
           <a:prstGeom xmlns:a="http://schemas.openxmlformats.org/drawingml/2006/main" prst="rect">
             <a:avLst/>
@@ -8383,7 +8385,7 @@
           <a:lstStyle xmlns:a="http://schemas.openxmlformats.org/drawingml/2006/main"/>
           <a:p xmlns:a="http://schemas.openxmlformats.org/drawingml/2006/main">
             <a:pPr algn="l">
-              <a:defRPr sz="1500" b="0">
+              <a:defRPr sz="1725" b="0">
                 <a:solidFill>
                   <a:srgbClr val="17253A"/>
                 </a:solidFill>
@@ -8393,7 +8395,7 @@
               </a:defRPr>
             </a:pPr>
             <a:r>
-              <a:rPr sz="1500" b="0">
+              <a:rPr sz="1725" b="0">
                 <a:solidFill>
                   <a:srgbClr val="17253A"/>
                 </a:solidFill>
@@ -8401,7 +8403,7 @@
                 <a:ea typeface="Arial"/>
                 <a:cs typeface="Arial"/>
               </a:rPr>
-              <a:t>Identify the structure: Identify brackets and multiplication or division before calculating.</a:t>
+              <a:t>240 ÷ (8 + 4)</a:t>
             </a:r>
           </a:p>
         </p:txBody>
@@ -8411,28 +8413,30 @@
           <p:cNvPr id="14" name="">
             <a:extLst xmlns:a="http://schemas.openxmlformats.org/drawingml/2006/main">
               <a:ext uri="{FF2B5EF4-FFF2-40B4-BE49-F238E27FC236}">
-                <a16:creationId xmlns:a16="http://schemas.microsoft.com/office/drawing/2014/main" id="{ED6995F2-ECDD-4A89-801B-C02233935561}"/>
-              </a:ext>
-            </a:extLst>
-          </p:cNvPr>
-          <p:cNvSpPr>
-            <a:spLocks xmlns:a="http://schemas.openxmlformats.org/drawingml/2006/main" noGrp="1"/>
-          </p:cNvSpPr>
-          <p:nvPr/>
-        </p:nvSpPr>
-        <p:spPr>
-          <a:xfrm xmlns:a="http://schemas.openxmlformats.org/drawingml/2006/main">
-            <a:off x="1000125" y="2990850"/>
-            <a:ext cx="476250" cy="476250"/>
-          </a:xfrm>
-          <a:prstGeom xmlns:a="http://schemas.openxmlformats.org/drawingml/2006/main" prst="ellipse">
+                <a16:creationId xmlns:a16="http://schemas.microsoft.com/office/drawing/2014/main" id="{64F0CE4A-7013-4687-9C5C-039C1F8F6AD3}"/>
+              </a:ext>
+            </a:extLst>
+          </p:cNvPr>
+          <p:cNvSpPr>
+            <a:spLocks xmlns:a="http://schemas.openxmlformats.org/drawingml/2006/main" noGrp="1"/>
+          </p:cNvSpPr>
+          <p:nvPr/>
+        </p:nvSpPr>
+        <p:spPr>
+          <a:xfrm xmlns:a="http://schemas.openxmlformats.org/drawingml/2006/main">
+            <a:off x="1714500" y="2943225"/>
+            <a:ext cx="9334500" cy="9525"/>
+          </a:xfrm>
+          <a:prstGeom xmlns:a="http://schemas.openxmlformats.org/drawingml/2006/main" prst="rect">
             <a:avLst/>
           </a:prstGeom>
           <a:solidFill xmlns:a="http://schemas.openxmlformats.org/drawingml/2006/main">
-            <a:srgbClr val="2C6E73"/>
+            <a:srgbClr val="D9E0E6"/>
           </a:solidFill>
           <a:ln xmlns:a="http://schemas.openxmlformats.org/drawingml/2006/main" w="0">
-            <a:noFill/>
+            <a:solidFill>
+              <a:srgbClr val="D9E0E6"/>
+            </a:solidFill>
           </a:ln>
         </p:spPr>
       </p:sp>
@@ -8441,19 +8445,19 @@
           <p:cNvPr id="15" name="">
             <a:extLst xmlns:a="http://schemas.openxmlformats.org/drawingml/2006/main">
               <a:ext uri="{FF2B5EF4-FFF2-40B4-BE49-F238E27FC236}">
-                <a16:creationId xmlns:a16="http://schemas.microsoft.com/office/drawing/2014/main" id="{5CBFBA4D-E945-4107-AB37-5154F259E99F}"/>
-              </a:ext>
-            </a:extLst>
-          </p:cNvPr>
-          <p:cNvSpPr>
-            <a:spLocks xmlns:a="http://schemas.openxmlformats.org/drawingml/2006/main" noGrp="1"/>
-          </p:cNvSpPr>
-          <p:nvPr/>
-        </p:nvSpPr>
-        <p:spPr>
-          <a:xfrm xmlns:a="http://schemas.openxmlformats.org/drawingml/2006/main">
-            <a:off x="1000125" y="3019425"/>
-            <a:ext cx="476250" cy="419100"/>
+                <a16:creationId xmlns:a16="http://schemas.microsoft.com/office/drawing/2014/main" id="{8E20F401-F323-4D96-8043-9560CD0DCB1D}"/>
+              </a:ext>
+            </a:extLst>
+          </p:cNvPr>
+          <p:cNvSpPr>
+            <a:spLocks xmlns:a="http://schemas.openxmlformats.org/drawingml/2006/main" noGrp="1"/>
+          </p:cNvSpPr>
+          <p:nvPr/>
+        </p:nvSpPr>
+        <p:spPr>
+          <a:xfrm xmlns:a="http://schemas.openxmlformats.org/drawingml/2006/main">
+            <a:off x="1162050" y="3076575"/>
+            <a:ext cx="400050" cy="400050"/>
           </a:xfrm>
           <a:prstGeom xmlns:a="http://schemas.openxmlformats.org/drawingml/2006/main" prst="rect">
             <a:avLst/>
@@ -8470,9 +8474,9 @@
           <a:lstStyle xmlns:a="http://schemas.openxmlformats.org/drawingml/2006/main"/>
           <a:p xmlns:a="http://schemas.openxmlformats.org/drawingml/2006/main">
             <a:pPr algn="ctr">
-              <a:defRPr sz="1350" b="1">
-                <a:solidFill>
-                  <a:srgbClr val="FFFFFF"/>
+              <a:defRPr sz="1125" b="1">
+                <a:solidFill>
+                  <a:srgbClr val="2C6E73"/>
                 </a:solidFill>
                 <a:latin typeface="Arial"/>
                 <a:ea typeface="Arial"/>
@@ -8480,9 +8484,9 @@
               </a:defRPr>
             </a:pPr>
             <a:r>
-              <a:rPr sz="1350" b="1">
-                <a:solidFill>
-                  <a:srgbClr val="FFFFFF"/>
+              <a:rPr sz="1125" b="1">
+                <a:solidFill>
+                  <a:srgbClr val="2C6E73"/>
                 </a:solidFill>
                 <a:latin typeface="Arial"/>
                 <a:ea typeface="Arial"/>
@@ -8498,19 +8502,19 @@
           <p:cNvPr id="16" name="">
             <a:extLst xmlns:a="http://schemas.openxmlformats.org/drawingml/2006/main">
               <a:ext uri="{FF2B5EF4-FFF2-40B4-BE49-F238E27FC236}">
-                <a16:creationId xmlns:a16="http://schemas.microsoft.com/office/drawing/2014/main" id="{FF482C93-F94F-4CFC-9FBC-A55D1BD08CF8}"/>
-              </a:ext>
-            </a:extLst>
-          </p:cNvPr>
-          <p:cNvSpPr>
-            <a:spLocks xmlns:a="http://schemas.openxmlformats.org/drawingml/2006/main" noGrp="1"/>
-          </p:cNvSpPr>
-          <p:nvPr/>
-        </p:nvSpPr>
-        <p:spPr>
-          <a:xfrm xmlns:a="http://schemas.openxmlformats.org/drawingml/2006/main">
-            <a:off x="1714500" y="2924175"/>
-            <a:ext cx="9429750" cy="609600"/>
+                <a16:creationId xmlns:a16="http://schemas.microsoft.com/office/drawing/2014/main" id="{518F125E-EA61-4B9F-8DF0-B763C172CD1D}"/>
+              </a:ext>
+            </a:extLst>
+          </p:cNvPr>
+          <p:cNvSpPr>
+            <a:spLocks xmlns:a="http://schemas.openxmlformats.org/drawingml/2006/main" noGrp="1"/>
+          </p:cNvSpPr>
+          <p:nvPr/>
+        </p:nvSpPr>
+        <p:spPr>
+          <a:xfrm xmlns:a="http://schemas.openxmlformats.org/drawingml/2006/main">
+            <a:off x="1714500" y="2990850"/>
+            <a:ext cx="9525000" cy="809625"/>
           </a:xfrm>
           <a:prstGeom xmlns:a="http://schemas.openxmlformats.org/drawingml/2006/main" prst="rect">
             <a:avLst/>
@@ -8527,7 +8531,7 @@
           <a:lstStyle xmlns:a="http://schemas.openxmlformats.org/drawingml/2006/main"/>
           <a:p xmlns:a="http://schemas.openxmlformats.org/drawingml/2006/main">
             <a:pPr algn="l">
-              <a:defRPr sz="1500" b="0">
+              <a:defRPr sz="1725" b="0">
                 <a:solidFill>
                   <a:srgbClr val="17253A"/>
                 </a:solidFill>
@@ -8537,7 +8541,7 @@
               </a:defRPr>
             </a:pPr>
             <a:r>
-              <a:rPr sz="1500" b="0">
+              <a:rPr sz="1725" b="0">
                 <a:solidFill>
                   <a:srgbClr val="17253A"/>
                 </a:solidFill>
@@ -8545,7 +8549,7 @@
                 <a:ea typeface="Arial"/>
                 <a:cs typeface="Arial"/>
               </a:rPr>
-              <a:t>Set up the method: Work through operations of equal priority from left to right.</a:t>
+              <a:t>Brackets first: 8 + 4 = 12</a:t>
             </a:r>
           </a:p>
         </p:txBody>
@@ -8555,28 +8559,30 @@
           <p:cNvPr id="17" name="">
             <a:extLst xmlns:a="http://schemas.openxmlformats.org/drawingml/2006/main">
               <a:ext uri="{FF2B5EF4-FFF2-40B4-BE49-F238E27FC236}">
-                <a16:creationId xmlns:a16="http://schemas.microsoft.com/office/drawing/2014/main" id="{5CD396B8-9793-42A3-9F49-B5827E64344A}"/>
-              </a:ext>
-            </a:extLst>
-          </p:cNvPr>
-          <p:cNvSpPr>
-            <a:spLocks xmlns:a="http://schemas.openxmlformats.org/drawingml/2006/main" noGrp="1"/>
-          </p:cNvSpPr>
-          <p:nvPr/>
-        </p:nvSpPr>
-        <p:spPr>
-          <a:xfrm xmlns:a="http://schemas.openxmlformats.org/drawingml/2006/main">
-            <a:off x="1000125" y="3733800"/>
-            <a:ext cx="476250" cy="476250"/>
-          </a:xfrm>
-          <a:prstGeom xmlns:a="http://schemas.openxmlformats.org/drawingml/2006/main" prst="ellipse">
+                <a16:creationId xmlns:a16="http://schemas.microsoft.com/office/drawing/2014/main" id="{A59FC148-5F1D-41D0-AADC-5CC7C663B3E6}"/>
+              </a:ext>
+            </a:extLst>
+          </p:cNvPr>
+          <p:cNvSpPr>
+            <a:spLocks xmlns:a="http://schemas.openxmlformats.org/drawingml/2006/main" noGrp="1"/>
+          </p:cNvSpPr>
+          <p:nvPr/>
+        </p:nvSpPr>
+        <p:spPr>
+          <a:xfrm xmlns:a="http://schemas.openxmlformats.org/drawingml/2006/main">
+            <a:off x="1714500" y="3819525"/>
+            <a:ext cx="9334500" cy="9525"/>
+          </a:xfrm>
+          <a:prstGeom xmlns:a="http://schemas.openxmlformats.org/drawingml/2006/main" prst="rect">
             <a:avLst/>
           </a:prstGeom>
           <a:solidFill xmlns:a="http://schemas.openxmlformats.org/drawingml/2006/main">
-            <a:srgbClr val="2C6E73"/>
+            <a:srgbClr val="D9E0E6"/>
           </a:solidFill>
           <a:ln xmlns:a="http://schemas.openxmlformats.org/drawingml/2006/main" w="0">
-            <a:noFill/>
+            <a:solidFill>
+              <a:srgbClr val="D9E0E6"/>
+            </a:solidFill>
           </a:ln>
         </p:spPr>
       </p:sp>
@@ -8585,19 +8591,19 @@
           <p:cNvPr id="18" name="">
             <a:extLst xmlns:a="http://schemas.openxmlformats.org/drawingml/2006/main">
               <a:ext uri="{FF2B5EF4-FFF2-40B4-BE49-F238E27FC236}">
-                <a16:creationId xmlns:a16="http://schemas.microsoft.com/office/drawing/2014/main" id="{679B3ACD-4610-4F3B-B674-A373C4D092E0}"/>
-              </a:ext>
-            </a:extLst>
-          </p:cNvPr>
-          <p:cNvSpPr>
-            <a:spLocks xmlns:a="http://schemas.openxmlformats.org/drawingml/2006/main" noGrp="1"/>
-          </p:cNvSpPr>
-          <p:nvPr/>
-        </p:nvSpPr>
-        <p:spPr>
-          <a:xfrm xmlns:a="http://schemas.openxmlformats.org/drawingml/2006/main">
-            <a:off x="1000125" y="3762375"/>
-            <a:ext cx="476250" cy="419100"/>
+                <a16:creationId xmlns:a16="http://schemas.microsoft.com/office/drawing/2014/main" id="{92041706-5E59-495E-B2BF-4419BB30B6B0}"/>
+              </a:ext>
+            </a:extLst>
+          </p:cNvPr>
+          <p:cNvSpPr>
+            <a:spLocks xmlns:a="http://schemas.openxmlformats.org/drawingml/2006/main" noGrp="1"/>
+          </p:cNvSpPr>
+          <p:nvPr/>
+        </p:nvSpPr>
+        <p:spPr>
+          <a:xfrm xmlns:a="http://schemas.openxmlformats.org/drawingml/2006/main">
+            <a:off x="1162050" y="3952875"/>
+            <a:ext cx="400050" cy="400050"/>
           </a:xfrm>
           <a:prstGeom xmlns:a="http://schemas.openxmlformats.org/drawingml/2006/main" prst="rect">
             <a:avLst/>
@@ -8614,9 +8620,9 @@
           <a:lstStyle xmlns:a="http://schemas.openxmlformats.org/drawingml/2006/main"/>
           <a:p xmlns:a="http://schemas.openxmlformats.org/drawingml/2006/main">
             <a:pPr algn="ctr">
-              <a:defRPr sz="1350" b="1">
-                <a:solidFill>
-                  <a:srgbClr val="FFFFFF"/>
+              <a:defRPr sz="1125" b="1">
+                <a:solidFill>
+                  <a:srgbClr val="2C6E73"/>
                 </a:solidFill>
                 <a:latin typeface="Arial"/>
                 <a:ea typeface="Arial"/>
@@ -8624,9 +8630,9 @@
               </a:defRPr>
             </a:pPr>
             <a:r>
-              <a:rPr sz="1350" b="1">
-                <a:solidFill>
-                  <a:srgbClr val="FFFFFF"/>
+              <a:rPr sz="1125" b="1">
+                <a:solidFill>
+                  <a:srgbClr val="2C6E73"/>
                 </a:solidFill>
                 <a:latin typeface="Arial"/>
                 <a:ea typeface="Arial"/>
@@ -8642,19 +8648,19 @@
           <p:cNvPr id="19" name="">
             <a:extLst xmlns:a="http://schemas.openxmlformats.org/drawingml/2006/main">
               <a:ext uri="{FF2B5EF4-FFF2-40B4-BE49-F238E27FC236}">
-                <a16:creationId xmlns:a16="http://schemas.microsoft.com/office/drawing/2014/main" id="{FB8F995C-A18B-49A6-9718-669C22DBFB86}"/>
-              </a:ext>
-            </a:extLst>
-          </p:cNvPr>
-          <p:cNvSpPr>
-            <a:spLocks xmlns:a="http://schemas.openxmlformats.org/drawingml/2006/main" noGrp="1"/>
-          </p:cNvSpPr>
-          <p:nvPr/>
-        </p:nvSpPr>
-        <p:spPr>
-          <a:xfrm xmlns:a="http://schemas.openxmlformats.org/drawingml/2006/main">
-            <a:off x="1714500" y="3667125"/>
-            <a:ext cx="9429750" cy="609600"/>
+                <a16:creationId xmlns:a16="http://schemas.microsoft.com/office/drawing/2014/main" id="{D3D37DCD-3CA8-477B-A53D-3FDA6BFABEF8}"/>
+              </a:ext>
+            </a:extLst>
+          </p:cNvPr>
+          <p:cNvSpPr>
+            <a:spLocks xmlns:a="http://schemas.openxmlformats.org/drawingml/2006/main" noGrp="1"/>
+          </p:cNvSpPr>
+          <p:nvPr/>
+        </p:nvSpPr>
+        <p:spPr>
+          <a:xfrm xmlns:a="http://schemas.openxmlformats.org/drawingml/2006/main">
+            <a:off x="1714500" y="3867150"/>
+            <a:ext cx="9525000" cy="809625"/>
           </a:xfrm>
           <a:prstGeom xmlns:a="http://schemas.openxmlformats.org/drawingml/2006/main" prst="rect">
             <a:avLst/>
@@ -8671,7 +8677,7 @@
           <a:lstStyle xmlns:a="http://schemas.openxmlformats.org/drawingml/2006/main"/>
           <a:p xmlns:a="http://schemas.openxmlformats.org/drawingml/2006/main">
             <a:pPr algn="l">
-              <a:defRPr sz="1500" b="0">
+              <a:defRPr sz="1725" b="0">
                 <a:solidFill>
                   <a:srgbClr val="17253A"/>
                 </a:solidFill>
@@ -8681,7 +8687,7 @@
               </a:defRPr>
             </a:pPr>
             <a:r>
-              <a:rPr sz="1500" b="0">
+              <a:rPr sz="1725" b="0">
                 <a:solidFill>
                   <a:srgbClr val="17253A"/>
                 </a:solidFill>
@@ -8689,7 +8695,7 @@
                 <a:ea typeface="Arial"/>
                 <a:cs typeface="Arial"/>
               </a:rPr>
-              <a:t>Complete the calculation: 20.</a:t>
+              <a:t>240 ÷ 12</a:t>
             </a:r>
           </a:p>
         </p:txBody>
@@ -8699,28 +8705,30 @@
           <p:cNvPr id="20" name="">
             <a:extLst xmlns:a="http://schemas.openxmlformats.org/drawingml/2006/main">
               <a:ext uri="{FF2B5EF4-FFF2-40B4-BE49-F238E27FC236}">
-                <a16:creationId xmlns:a16="http://schemas.microsoft.com/office/drawing/2014/main" id="{D9A5B2FE-A587-4D6C-9FC1-6B581860FDF5}"/>
-              </a:ext>
-            </a:extLst>
-          </p:cNvPr>
-          <p:cNvSpPr>
-            <a:spLocks xmlns:a="http://schemas.openxmlformats.org/drawingml/2006/main" noGrp="1"/>
-          </p:cNvSpPr>
-          <p:nvPr/>
-        </p:nvSpPr>
-        <p:spPr>
-          <a:xfrm xmlns:a="http://schemas.openxmlformats.org/drawingml/2006/main">
-            <a:off x="1000125" y="4476750"/>
-            <a:ext cx="476250" cy="476250"/>
-          </a:xfrm>
-          <a:prstGeom xmlns:a="http://schemas.openxmlformats.org/drawingml/2006/main" prst="ellipse">
+                <a16:creationId xmlns:a16="http://schemas.microsoft.com/office/drawing/2014/main" id="{80A81C6E-F0FA-4EA4-9ECE-69857EBE1DBA}"/>
+              </a:ext>
+            </a:extLst>
+          </p:cNvPr>
+          <p:cNvSpPr>
+            <a:spLocks xmlns:a="http://schemas.openxmlformats.org/drawingml/2006/main" noGrp="1"/>
+          </p:cNvSpPr>
+          <p:nvPr/>
+        </p:nvSpPr>
+        <p:spPr>
+          <a:xfrm xmlns:a="http://schemas.openxmlformats.org/drawingml/2006/main">
+            <a:off x="1714500" y="4695825"/>
+            <a:ext cx="9334500" cy="9525"/>
+          </a:xfrm>
+          <a:prstGeom xmlns:a="http://schemas.openxmlformats.org/drawingml/2006/main" prst="rect">
             <a:avLst/>
           </a:prstGeom>
           <a:solidFill xmlns:a="http://schemas.openxmlformats.org/drawingml/2006/main">
-            <a:srgbClr val="2C6E73"/>
+            <a:srgbClr val="D9E0E6"/>
           </a:solidFill>
           <a:ln xmlns:a="http://schemas.openxmlformats.org/drawingml/2006/main" w="0">
-            <a:noFill/>
+            <a:solidFill>
+              <a:srgbClr val="D9E0E6"/>
+            </a:solidFill>
           </a:ln>
         </p:spPr>
       </p:sp>
@@ -8729,19 +8737,19 @@
           <p:cNvPr id="21" name="">
             <a:extLst xmlns:a="http://schemas.openxmlformats.org/drawingml/2006/main">
               <a:ext uri="{FF2B5EF4-FFF2-40B4-BE49-F238E27FC236}">
-                <a16:creationId xmlns:a16="http://schemas.microsoft.com/office/drawing/2014/main" id="{6D340A62-BE02-4917-B800-517A8155DFCB}"/>
-              </a:ext>
-            </a:extLst>
-          </p:cNvPr>
-          <p:cNvSpPr>
-            <a:spLocks xmlns:a="http://schemas.openxmlformats.org/drawingml/2006/main" noGrp="1"/>
-          </p:cNvSpPr>
-          <p:nvPr/>
-        </p:nvSpPr>
-        <p:spPr>
-          <a:xfrm xmlns:a="http://schemas.openxmlformats.org/drawingml/2006/main">
-            <a:off x="1000125" y="4505325"/>
-            <a:ext cx="476250" cy="419100"/>
+                <a16:creationId xmlns:a16="http://schemas.microsoft.com/office/drawing/2014/main" id="{629186B5-430D-405E-8AA6-26B079802B0D}"/>
+              </a:ext>
+            </a:extLst>
+          </p:cNvPr>
+          <p:cNvSpPr>
+            <a:spLocks xmlns:a="http://schemas.openxmlformats.org/drawingml/2006/main" noGrp="1"/>
+          </p:cNvSpPr>
+          <p:nvPr/>
+        </p:nvSpPr>
+        <p:spPr>
+          <a:xfrm xmlns:a="http://schemas.openxmlformats.org/drawingml/2006/main">
+            <a:off x="1162050" y="4829175"/>
+            <a:ext cx="400050" cy="400050"/>
           </a:xfrm>
           <a:prstGeom xmlns:a="http://schemas.openxmlformats.org/drawingml/2006/main" prst="rect">
             <a:avLst/>
@@ -8758,9 +8766,9 @@
           <a:lstStyle xmlns:a="http://schemas.openxmlformats.org/drawingml/2006/main"/>
           <a:p xmlns:a="http://schemas.openxmlformats.org/drawingml/2006/main">
             <a:pPr algn="ctr">
-              <a:defRPr sz="1350" b="1">
-                <a:solidFill>
-                  <a:srgbClr val="FFFFFF"/>
+              <a:defRPr sz="1125" b="1">
+                <a:solidFill>
+                  <a:srgbClr val="2F785D"/>
                 </a:solidFill>
                 <a:latin typeface="Arial"/>
                 <a:ea typeface="Arial"/>
@@ -8768,9 +8776,9 @@
               </a:defRPr>
             </a:pPr>
             <a:r>
-              <a:rPr sz="1350" b="1">
-                <a:solidFill>
-                  <a:srgbClr val="FFFFFF"/>
+              <a:rPr sz="1125" b="1">
+                <a:solidFill>
+                  <a:srgbClr val="2F785D"/>
                 </a:solidFill>
                 <a:latin typeface="Arial"/>
                 <a:ea typeface="Arial"/>
@@ -8786,19 +8794,19 @@
           <p:cNvPr id="22" name="">
             <a:extLst xmlns:a="http://schemas.openxmlformats.org/drawingml/2006/main">
               <a:ext uri="{FF2B5EF4-FFF2-40B4-BE49-F238E27FC236}">
-                <a16:creationId xmlns:a16="http://schemas.microsoft.com/office/drawing/2014/main" id="{183B155E-32B0-4520-B22C-E4D656EE680C}"/>
-              </a:ext>
-            </a:extLst>
-          </p:cNvPr>
-          <p:cNvSpPr>
-            <a:spLocks xmlns:a="http://schemas.openxmlformats.org/drawingml/2006/main" noGrp="1"/>
-          </p:cNvSpPr>
-          <p:nvPr/>
-        </p:nvSpPr>
-        <p:spPr>
-          <a:xfrm xmlns:a="http://schemas.openxmlformats.org/drawingml/2006/main">
-            <a:off x="1714500" y="4410075"/>
-            <a:ext cx="9429750" cy="609600"/>
+                <a16:creationId xmlns:a16="http://schemas.microsoft.com/office/drawing/2014/main" id="{06C0C879-B7FB-4E15-9EB5-63F2E2D6440E}"/>
+              </a:ext>
+            </a:extLst>
+          </p:cNvPr>
+          <p:cNvSpPr>
+            <a:spLocks xmlns:a="http://schemas.openxmlformats.org/drawingml/2006/main" noGrp="1"/>
+          </p:cNvSpPr>
+          <p:nvPr/>
+        </p:nvSpPr>
+        <p:spPr>
+          <a:xfrm xmlns:a="http://schemas.openxmlformats.org/drawingml/2006/main">
+            <a:off x="1714500" y="4743450"/>
+            <a:ext cx="9525000" cy="809625"/>
           </a:xfrm>
           <a:prstGeom xmlns:a="http://schemas.openxmlformats.org/drawingml/2006/main" prst="rect">
             <a:avLst/>
@@ -8815,7 +8823,7 @@
           <a:lstStyle xmlns:a="http://schemas.openxmlformats.org/drawingml/2006/main"/>
           <a:p xmlns:a="http://schemas.openxmlformats.org/drawingml/2006/main">
             <a:pPr algn="l">
-              <a:defRPr sz="1500" b="1">
+              <a:defRPr sz="1725" b="1">
                 <a:solidFill>
                   <a:srgbClr val="2F785D"/>
                 </a:solidFill>
@@ -8825,7 +8833,7 @@
               </a:defRPr>
             </a:pPr>
             <a:r>
-              <a:rPr sz="1500" b="1">
+              <a:rPr sz="1725" b="1">
                 <a:solidFill>
                   <a:srgbClr val="2F785D"/>
                 </a:solidFill>
@@ -8833,7 +8841,7 @@
                 <a:ea typeface="Arial"/>
                 <a:cs typeface="Arial"/>
               </a:rPr>
-              <a:t>Check the result: Check by estimating or comparing with an equivalent expression.</a:t>
+              <a:t>20</a:t>
             </a:r>
           </a:p>
         </p:txBody>
@@ -8841,7 +8849,7 @@
     </p:spTree>
     <p:extLst>
       <p:ext uri="{BB962C8B-B14F-4D97-AF65-F5344CB8AC3E}">
-        <p14:creationId xmlns:p14="http://schemas.microsoft.com/office/powerpoint/2010/main" val="1163358808"/>
+        <p14:creationId xmlns:p14="http://schemas.microsoft.com/office/powerpoint/2010/main" val="425656071"/>
       </p:ext>
     </p:extLst>
   </p:cSld>
@@ -9134,7 +9142,7 @@
           <p:cNvPr id="15" name="">
             <a:extLst xmlns:a="http://schemas.openxmlformats.org/drawingml/2006/main">
               <a:ext uri="{FF2B5EF4-FFF2-40B4-BE49-F238E27FC236}">
-                <a16:creationId xmlns:a16="http://schemas.microsoft.com/office/drawing/2014/main" id="{6E3D2E39-CB6B-47AC-AB4B-6F5E0F111574}"/>
+                <a16:creationId xmlns:a16="http://schemas.microsoft.com/office/drawing/2014/main" id="{CB0664C6-13B2-4043-BB92-C9108D2AFE30}"/>
               </a:ext>
             </a:extLst>
           </p:cNvPr>
@@ -9166,7 +9174,7 @@
           <p:cNvPr id="2" name="">
             <a:extLst xmlns:a="http://schemas.openxmlformats.org/drawingml/2006/main">
               <a:ext uri="{FF2B5EF4-FFF2-40B4-BE49-F238E27FC236}">
-                <a16:creationId xmlns:a16="http://schemas.microsoft.com/office/drawing/2014/main" id="{C62A0729-55BA-42A5-A9F6-B8EDBF28B490}"/>
+                <a16:creationId xmlns:a16="http://schemas.microsoft.com/office/drawing/2014/main" id="{BE2D52BD-5FE6-410B-808C-87FE1D8918F2}"/>
               </a:ext>
             </a:extLst>
           </p:cNvPr>
@@ -9223,7 +9231,7 @@
           <p:cNvPr id="3" name="">
             <a:extLst xmlns:a="http://schemas.openxmlformats.org/drawingml/2006/main">
               <a:ext uri="{FF2B5EF4-FFF2-40B4-BE49-F238E27FC236}">
-                <a16:creationId xmlns:a16="http://schemas.microsoft.com/office/drawing/2014/main" id="{1C29DEBB-0198-4822-93DB-000038AE6EF7}"/>
+                <a16:creationId xmlns:a16="http://schemas.microsoft.com/office/drawing/2014/main" id="{251D75F0-D854-4F23-BB97-FAD2DF22BD34}"/>
               </a:ext>
             </a:extLst>
           </p:cNvPr>
@@ -9255,7 +9263,7 @@
           <p:cNvPr id="4" name="">
             <a:extLst xmlns:a="http://schemas.openxmlformats.org/drawingml/2006/main">
               <a:ext uri="{FF2B5EF4-FFF2-40B4-BE49-F238E27FC236}">
-                <a16:creationId xmlns:a16="http://schemas.microsoft.com/office/drawing/2014/main" id="{328D569D-7D50-42C3-8F0F-001547C52B8B}"/>
+                <a16:creationId xmlns:a16="http://schemas.microsoft.com/office/drawing/2014/main" id="{F1A4E137-69DA-4B43-940D-B829B450C3AD}"/>
               </a:ext>
             </a:extLst>
           </p:cNvPr>
@@ -9312,7 +9320,7 @@
           <p:cNvPr id="5" name="">
             <a:extLst xmlns:a="http://schemas.openxmlformats.org/drawingml/2006/main">
               <a:ext uri="{FF2B5EF4-FFF2-40B4-BE49-F238E27FC236}">
-                <a16:creationId xmlns:a16="http://schemas.microsoft.com/office/drawing/2014/main" id="{C0E0C61E-C233-4CEC-9CCB-189BF3DD42F5}"/>
+                <a16:creationId xmlns:a16="http://schemas.microsoft.com/office/drawing/2014/main" id="{A9DAB762-91C2-4C1C-A083-3BC97A3CA394}"/>
               </a:ext>
             </a:extLst>
           </p:cNvPr>
@@ -9369,7 +9377,7 @@
           <p:cNvPr id="6" name="">
             <a:extLst xmlns:a="http://schemas.openxmlformats.org/drawingml/2006/main">
               <a:ext uri="{FF2B5EF4-FFF2-40B4-BE49-F238E27FC236}">
-                <a16:creationId xmlns:a16="http://schemas.microsoft.com/office/drawing/2014/main" id="{461BCC67-9AB9-4E6B-800F-9066F969BC7E}"/>
+                <a16:creationId xmlns:a16="http://schemas.microsoft.com/office/drawing/2014/main" id="{9440D30E-42F1-46FB-9E7A-62AD4E5A61EE}"/>
               </a:ext>
             </a:extLst>
           </p:cNvPr>
@@ -9426,7 +9434,7 @@
           <p:cNvPr id="7" name="">
             <a:extLst xmlns:a="http://schemas.openxmlformats.org/drawingml/2006/main">
               <a:ext uri="{FF2B5EF4-FFF2-40B4-BE49-F238E27FC236}">
-                <a16:creationId xmlns:a16="http://schemas.microsoft.com/office/drawing/2014/main" id="{9A0B1519-6FA6-4CB3-8B0B-3EFF11354EA2}"/>
+                <a16:creationId xmlns:a16="http://schemas.microsoft.com/office/drawing/2014/main" id="{66C5A280-FAAC-40B5-AA45-5442074974E9}"/>
               </a:ext>
             </a:extLst>
           </p:cNvPr>
@@ -9458,7 +9466,7 @@
           <p:cNvPr id="8" name="">
             <a:extLst xmlns:a="http://schemas.openxmlformats.org/drawingml/2006/main">
               <a:ext uri="{FF2B5EF4-FFF2-40B4-BE49-F238E27FC236}">
-                <a16:creationId xmlns:a16="http://schemas.microsoft.com/office/drawing/2014/main" id="{1D663637-AE85-4A1D-9744-BD3B7C3DB20F}"/>
+                <a16:creationId xmlns:a16="http://schemas.microsoft.com/office/drawing/2014/main" id="{117A7F76-3B27-4DFB-9621-E5AB3DC96506}"/>
               </a:ext>
             </a:extLst>
           </p:cNvPr>
@@ -9515,7 +9523,7 @@
           <p:cNvPr id="9" name="">
             <a:extLst xmlns:a="http://schemas.openxmlformats.org/drawingml/2006/main">
               <a:ext uri="{FF2B5EF4-FFF2-40B4-BE49-F238E27FC236}">
-                <a16:creationId xmlns:a16="http://schemas.microsoft.com/office/drawing/2014/main" id="{339B8CFA-48AD-4524-8AF4-EF0C9B7D74E0}"/>
+                <a16:creationId xmlns:a16="http://schemas.microsoft.com/office/drawing/2014/main" id="{6078F327-D68D-4ACD-8C78-84ABFFC24511}"/>
               </a:ext>
             </a:extLst>
           </p:cNvPr>
@@ -9572,7 +9580,7 @@
           <p:cNvPr id="10" name="">
             <a:extLst xmlns:a="http://schemas.openxmlformats.org/drawingml/2006/main">
               <a:ext uri="{FF2B5EF4-FFF2-40B4-BE49-F238E27FC236}">
-                <a16:creationId xmlns:a16="http://schemas.microsoft.com/office/drawing/2014/main" id="{80C09713-3185-4904-9A1C-BBB369570E57}"/>
+                <a16:creationId xmlns:a16="http://schemas.microsoft.com/office/drawing/2014/main" id="{5DDB5E13-0438-40FB-A946-1514852F4CCE}"/>
               </a:ext>
             </a:extLst>
           </p:cNvPr>
@@ -9629,7 +9637,7 @@
           <p:cNvPr id="11" name="">
             <a:extLst xmlns:a="http://schemas.openxmlformats.org/drawingml/2006/main">
               <a:ext uri="{FF2B5EF4-FFF2-40B4-BE49-F238E27FC236}">
-                <a16:creationId xmlns:a16="http://schemas.microsoft.com/office/drawing/2014/main" id="{E6D23E0E-860F-4933-B7B5-D7F51787A56E}"/>
+                <a16:creationId xmlns:a16="http://schemas.microsoft.com/office/drawing/2014/main" id="{6681AE7C-D5B6-4B92-A3A2-FC5C0F5BC7F8}"/>
               </a:ext>
             </a:extLst>
           </p:cNvPr>
@@ -9686,7 +9694,7 @@
           <p:cNvPr id="12" name="">
             <a:extLst xmlns:a="http://schemas.openxmlformats.org/drawingml/2006/main">
               <a:ext uri="{FF2B5EF4-FFF2-40B4-BE49-F238E27FC236}">
-                <a16:creationId xmlns:a16="http://schemas.microsoft.com/office/drawing/2014/main" id="{95E193AD-EB7F-4C1D-9A73-598A2E09CCC0}"/>
+                <a16:creationId xmlns:a16="http://schemas.microsoft.com/office/drawing/2014/main" id="{AFA36478-E5BF-4901-BFED-C4875AAE84B4}"/>
               </a:ext>
             </a:extLst>
           </p:cNvPr>
@@ -9718,7 +9726,7 @@
           <p:cNvPr id="13" name="">
             <a:extLst xmlns:a="http://schemas.openxmlformats.org/drawingml/2006/main">
               <a:ext uri="{FF2B5EF4-FFF2-40B4-BE49-F238E27FC236}">
-                <a16:creationId xmlns:a16="http://schemas.microsoft.com/office/drawing/2014/main" id="{83B3811E-E036-4EA7-893A-C75EFC2E0F0A}"/>
+                <a16:creationId xmlns:a16="http://schemas.microsoft.com/office/drawing/2014/main" id="{496C5F26-35E9-479E-BC03-0BBFB8E60D33}"/>
               </a:ext>
             </a:extLst>
           </p:cNvPr>
@@ -9775,7 +9783,7 @@
           <p:cNvPr id="14" name="">
             <a:extLst xmlns:a="http://schemas.openxmlformats.org/drawingml/2006/main">
               <a:ext uri="{FF2B5EF4-FFF2-40B4-BE49-F238E27FC236}">
-                <a16:creationId xmlns:a16="http://schemas.microsoft.com/office/drawing/2014/main" id="{0F47D52C-5690-4123-9E39-8FDFDEC92430}"/>
+                <a16:creationId xmlns:a16="http://schemas.microsoft.com/office/drawing/2014/main" id="{374298D9-D378-494E-ACE0-5AF96B6AFB20}"/>
               </a:ext>
             </a:extLst>
           </p:cNvPr>
@@ -9830,7 +9838,7 @@
     </p:spTree>
     <p:extLst>
       <p:ext uri="{BB962C8B-B14F-4D97-AF65-F5344CB8AC3E}">
-        <p14:creationId xmlns:p14="http://schemas.microsoft.com/office/powerpoint/2010/main" val="629993031"/>
+        <p14:creationId xmlns:p14="http://schemas.microsoft.com/office/powerpoint/2010/main" val="465357155"/>
       </p:ext>
     </p:extLst>
   </p:cSld>
@@ -10031,7 +10039,7 @@
           <p:cNvPr id="16" name="">
             <a:extLst xmlns:a="http://schemas.openxmlformats.org/drawingml/2006/main">
               <a:ext uri="{FF2B5EF4-FFF2-40B4-BE49-F238E27FC236}">
-                <a16:creationId xmlns:a16="http://schemas.microsoft.com/office/drawing/2014/main" id="{A715E9B7-AD87-49A2-A08C-136FB0FA69BD}"/>
+                <a16:creationId xmlns:a16="http://schemas.microsoft.com/office/drawing/2014/main" id="{D777C503-ACAE-470A-9210-3DD4F9C97143}"/>
               </a:ext>
             </a:extLst>
           </p:cNvPr>
@@ -10063,7 +10071,7 @@
           <p:cNvPr id="2" name="">
             <a:extLst xmlns:a="http://schemas.openxmlformats.org/drawingml/2006/main">
               <a:ext uri="{FF2B5EF4-FFF2-40B4-BE49-F238E27FC236}">
-                <a16:creationId xmlns:a16="http://schemas.microsoft.com/office/drawing/2014/main" id="{04112BC1-B646-4CAD-AE43-DFB63D181867}"/>
+                <a16:creationId xmlns:a16="http://schemas.microsoft.com/office/drawing/2014/main" id="{B5A6959C-8176-4FE9-9809-07665888CC2E}"/>
               </a:ext>
             </a:extLst>
           </p:cNvPr>
@@ -10120,7 +10128,7 @@
           <p:cNvPr id="3" name="">
             <a:extLst xmlns:a="http://schemas.openxmlformats.org/drawingml/2006/main">
               <a:ext uri="{FF2B5EF4-FFF2-40B4-BE49-F238E27FC236}">
-                <a16:creationId xmlns:a16="http://schemas.microsoft.com/office/drawing/2014/main" id="{5CFFB507-02C0-4517-A363-CF04225C2FE1}"/>
+                <a16:creationId xmlns:a16="http://schemas.microsoft.com/office/drawing/2014/main" id="{CF09571F-23B1-4E6A-98EE-7FE3E7689FE5}"/>
               </a:ext>
             </a:extLst>
           </p:cNvPr>
@@ -10152,7 +10160,7 @@
           <p:cNvPr id="4" name="">
             <a:extLst xmlns:a="http://schemas.openxmlformats.org/drawingml/2006/main">
               <a:ext uri="{FF2B5EF4-FFF2-40B4-BE49-F238E27FC236}">
-                <a16:creationId xmlns:a16="http://schemas.microsoft.com/office/drawing/2014/main" id="{FA5F315B-7495-4FC7-8A01-386DF82515A4}"/>
+                <a16:creationId xmlns:a16="http://schemas.microsoft.com/office/drawing/2014/main" id="{678CAEFA-7BA4-4053-87D1-4FE86239DEEF}"/>
               </a:ext>
             </a:extLst>
           </p:cNvPr>
@@ -10209,7 +10217,7 @@
           <p:cNvPr id="5" name="">
             <a:extLst xmlns:a="http://schemas.openxmlformats.org/drawingml/2006/main">
               <a:ext uri="{FF2B5EF4-FFF2-40B4-BE49-F238E27FC236}">
-                <a16:creationId xmlns:a16="http://schemas.microsoft.com/office/drawing/2014/main" id="{9296AE09-FCA7-4912-A7FB-DC63304859A7}"/>
+                <a16:creationId xmlns:a16="http://schemas.microsoft.com/office/drawing/2014/main" id="{1C62CC1E-5A3D-4EAD-96DF-5895DDD5D043}"/>
               </a:ext>
             </a:extLst>
           </p:cNvPr>
@@ -10266,7 +10274,7 @@
           <p:cNvPr id="6" name="">
             <a:extLst xmlns:a="http://schemas.openxmlformats.org/drawingml/2006/main">
               <a:ext uri="{FF2B5EF4-FFF2-40B4-BE49-F238E27FC236}">
-                <a16:creationId xmlns:a16="http://schemas.microsoft.com/office/drawing/2014/main" id="{00CC198A-F001-417C-94A4-0534061393DC}"/>
+                <a16:creationId xmlns:a16="http://schemas.microsoft.com/office/drawing/2014/main" id="{0ACA4025-9FB7-4CC7-8182-C9777752EB8D}"/>
               </a:ext>
             </a:extLst>
           </p:cNvPr>
@@ -10323,7 +10331,7 @@
           <p:cNvPr id="7" name="">
             <a:extLst xmlns:a="http://schemas.openxmlformats.org/drawingml/2006/main">
               <a:ext uri="{FF2B5EF4-FFF2-40B4-BE49-F238E27FC236}">
-                <a16:creationId xmlns:a16="http://schemas.microsoft.com/office/drawing/2014/main" id="{A622A0ED-C6D2-4C94-A960-9EA25BC51DE1}"/>
+                <a16:creationId xmlns:a16="http://schemas.microsoft.com/office/drawing/2014/main" id="{C4DD6A99-0C82-4EAC-929F-EC228DCEFEBB}"/>
               </a:ext>
             </a:extLst>
           </p:cNvPr>
@@ -10355,7 +10363,7 @@
           <p:cNvPr id="8" name="">
             <a:extLst xmlns:a="http://schemas.openxmlformats.org/drawingml/2006/main">
               <a:ext uri="{FF2B5EF4-FFF2-40B4-BE49-F238E27FC236}">
-                <a16:creationId xmlns:a16="http://schemas.microsoft.com/office/drawing/2014/main" id="{54109121-2DB8-4C01-9842-4B5FC9E86469}"/>
+                <a16:creationId xmlns:a16="http://schemas.microsoft.com/office/drawing/2014/main" id="{424328D7-EA21-4249-9168-E5AACECB4386}"/>
               </a:ext>
             </a:extLst>
           </p:cNvPr>
@@ -10412,7 +10420,7 @@
           <p:cNvPr id="9" name="">
             <a:extLst xmlns:a="http://schemas.openxmlformats.org/drawingml/2006/main">
               <a:ext uri="{FF2B5EF4-FFF2-40B4-BE49-F238E27FC236}">
-                <a16:creationId xmlns:a16="http://schemas.microsoft.com/office/drawing/2014/main" id="{B3314CD1-F17C-4E3A-B9C7-964BC3CE67D0}"/>
+                <a16:creationId xmlns:a16="http://schemas.microsoft.com/office/drawing/2014/main" id="{100771E2-BCFD-420C-A741-0A91E105807B}"/>
               </a:ext>
             </a:extLst>
           </p:cNvPr>
@@ -10469,7 +10477,7 @@
           <p:cNvPr id="10" name="">
             <a:extLst xmlns:a="http://schemas.openxmlformats.org/drawingml/2006/main">
               <a:ext uri="{FF2B5EF4-FFF2-40B4-BE49-F238E27FC236}">
-                <a16:creationId xmlns:a16="http://schemas.microsoft.com/office/drawing/2014/main" id="{4A29D47F-92ED-46AF-BFCD-6DCC9CABD6AC}"/>
+                <a16:creationId xmlns:a16="http://schemas.microsoft.com/office/drawing/2014/main" id="{9D77DCD8-EB09-4625-AA0C-892AA922ED24}"/>
               </a:ext>
             </a:extLst>
           </p:cNvPr>
@@ -10526,7 +10534,7 @@
           <p:cNvPr id="11" name="">
             <a:extLst xmlns:a="http://schemas.openxmlformats.org/drawingml/2006/main">
               <a:ext uri="{FF2B5EF4-FFF2-40B4-BE49-F238E27FC236}">
-                <a16:creationId xmlns:a16="http://schemas.microsoft.com/office/drawing/2014/main" id="{A4C87A64-1309-4E41-BA04-2AF1FEEF3A5E}"/>
+                <a16:creationId xmlns:a16="http://schemas.microsoft.com/office/drawing/2014/main" id="{A27F71DC-2FB6-40AF-86BA-3505D4E57F34}"/>
               </a:ext>
             </a:extLst>
           </p:cNvPr>
@@ -10583,7 +10591,7 @@
           <p:cNvPr id="12" name="">
             <a:extLst xmlns:a="http://schemas.openxmlformats.org/drawingml/2006/main">
               <a:ext uri="{FF2B5EF4-FFF2-40B4-BE49-F238E27FC236}">
-                <a16:creationId xmlns:a16="http://schemas.microsoft.com/office/drawing/2014/main" id="{DF95C17C-66BE-4109-B91C-BA4B6D425264}"/>
+                <a16:creationId xmlns:a16="http://schemas.microsoft.com/office/drawing/2014/main" id="{B8B37456-983B-41E0-A41A-55BC2AF9C01F}"/>
               </a:ext>
             </a:extLst>
           </p:cNvPr>
@@ -10640,7 +10648,7 @@
           <p:cNvPr id="13" name="">
             <a:extLst xmlns:a="http://schemas.openxmlformats.org/drawingml/2006/main">
               <a:ext uri="{FF2B5EF4-FFF2-40B4-BE49-F238E27FC236}">
-                <a16:creationId xmlns:a16="http://schemas.microsoft.com/office/drawing/2014/main" id="{05FCCE72-665F-42D0-B713-026A015D4121}"/>
+                <a16:creationId xmlns:a16="http://schemas.microsoft.com/office/drawing/2014/main" id="{BEC59643-2F93-47DB-868E-D23B5F1F1674}"/>
               </a:ext>
             </a:extLst>
           </p:cNvPr>
@@ -10697,7 +10705,7 @@
           <p:cNvPr id="14" name="">
             <a:extLst xmlns:a="http://schemas.openxmlformats.org/drawingml/2006/main">
               <a:ext uri="{FF2B5EF4-FFF2-40B4-BE49-F238E27FC236}">
-                <a16:creationId xmlns:a16="http://schemas.microsoft.com/office/drawing/2014/main" id="{9AAEAB17-1BEC-463E-ACC5-D097EADAC947}"/>
+                <a16:creationId xmlns:a16="http://schemas.microsoft.com/office/drawing/2014/main" id="{E3C24196-4B45-47E4-96AF-6B8A11FA19DA}"/>
               </a:ext>
             </a:extLst>
           </p:cNvPr>
@@ -10754,7 +10762,7 @@
           <p:cNvPr id="15" name="">
             <a:extLst xmlns:a="http://schemas.openxmlformats.org/drawingml/2006/main">
               <a:ext uri="{FF2B5EF4-FFF2-40B4-BE49-F238E27FC236}">
-                <a16:creationId xmlns:a16="http://schemas.microsoft.com/office/drawing/2014/main" id="{72D24683-8EDC-4E44-8B36-8EC6263D6037}"/>
+                <a16:creationId xmlns:a16="http://schemas.microsoft.com/office/drawing/2014/main" id="{67BF34FD-2DEF-4983-AE1E-8CEFEF8BB5A5}"/>
               </a:ext>
             </a:extLst>
           </p:cNvPr>
@@ -10809,7 +10817,7 @@
     </p:spTree>
     <p:extLst>
       <p:ext uri="{BB962C8B-B14F-4D97-AF65-F5344CB8AC3E}">
-        <p14:creationId xmlns:p14="http://schemas.microsoft.com/office/powerpoint/2010/main" val="283212768"/>
+        <p14:creationId xmlns:p14="http://schemas.microsoft.com/office/powerpoint/2010/main" val="794240859"/>
       </p:ext>
     </p:extLst>
   </p:cSld>
@@ -10964,7 +10972,7 @@
           <p:cNvPr id="16" name="">
             <a:extLst xmlns:a="http://schemas.openxmlformats.org/drawingml/2006/main">
               <a:ext uri="{FF2B5EF4-FFF2-40B4-BE49-F238E27FC236}">
-                <a16:creationId xmlns:a16="http://schemas.microsoft.com/office/drawing/2014/main" id="{EB893322-4A7A-4F1A-B194-7B451FF2B984}"/>
+                <a16:creationId xmlns:a16="http://schemas.microsoft.com/office/drawing/2014/main" id="{91481429-43D2-4C6B-A047-222B3CBCE6D1}"/>
               </a:ext>
             </a:extLst>
           </p:cNvPr>
@@ -10996,7 +11004,7 @@
           <p:cNvPr id="2" name="">
             <a:extLst xmlns:a="http://schemas.openxmlformats.org/drawingml/2006/main">
               <a:ext uri="{FF2B5EF4-FFF2-40B4-BE49-F238E27FC236}">
-                <a16:creationId xmlns:a16="http://schemas.microsoft.com/office/drawing/2014/main" id="{6BE4F07A-D757-4931-8049-61FED50CE495}"/>
+                <a16:creationId xmlns:a16="http://schemas.microsoft.com/office/drawing/2014/main" id="{261B9EB9-EE06-4EB5-A32B-069FB718C3E9}"/>
               </a:ext>
             </a:extLst>
           </p:cNvPr>
@@ -11053,7 +11061,7 @@
           <p:cNvPr id="3" name="">
             <a:extLst xmlns:a="http://schemas.openxmlformats.org/drawingml/2006/main">
               <a:ext uri="{FF2B5EF4-FFF2-40B4-BE49-F238E27FC236}">
-                <a16:creationId xmlns:a16="http://schemas.microsoft.com/office/drawing/2014/main" id="{EE07DA74-103B-4E54-BAAF-F1AF9C917C4E}"/>
+                <a16:creationId xmlns:a16="http://schemas.microsoft.com/office/drawing/2014/main" id="{7DE94776-E150-4781-B147-BB98EF4C0B49}"/>
               </a:ext>
             </a:extLst>
           </p:cNvPr>
@@ -11085,7 +11093,7 @@
           <p:cNvPr id="4" name="">
             <a:extLst xmlns:a="http://schemas.openxmlformats.org/drawingml/2006/main">
               <a:ext uri="{FF2B5EF4-FFF2-40B4-BE49-F238E27FC236}">
-                <a16:creationId xmlns:a16="http://schemas.microsoft.com/office/drawing/2014/main" id="{7FBF1E95-ECB0-4718-8534-B112CC28CA0B}"/>
+                <a16:creationId xmlns:a16="http://schemas.microsoft.com/office/drawing/2014/main" id="{442C2D56-0607-480A-93CB-1BFD71E882AE}"/>
               </a:ext>
             </a:extLst>
           </p:cNvPr>
@@ -11142,7 +11150,7 @@
           <p:cNvPr id="5" name="">
             <a:extLst xmlns:a="http://schemas.openxmlformats.org/drawingml/2006/main">
               <a:ext uri="{FF2B5EF4-FFF2-40B4-BE49-F238E27FC236}">
-                <a16:creationId xmlns:a16="http://schemas.microsoft.com/office/drawing/2014/main" id="{6A7D2DCF-7BA5-4770-A8C8-CE7632D89C60}"/>
+                <a16:creationId xmlns:a16="http://schemas.microsoft.com/office/drawing/2014/main" id="{DF9E85AF-690E-4CA9-8B3F-7BD9AB8E3B76}"/>
               </a:ext>
             </a:extLst>
           </p:cNvPr>
@@ -11199,7 +11207,7 @@
           <p:cNvPr id="6" name="">
             <a:extLst xmlns:a="http://schemas.openxmlformats.org/drawingml/2006/main">
               <a:ext uri="{FF2B5EF4-FFF2-40B4-BE49-F238E27FC236}">
-                <a16:creationId xmlns:a16="http://schemas.microsoft.com/office/drawing/2014/main" id="{B42CFB13-8561-4829-A786-A893B5D38EEE}"/>
+                <a16:creationId xmlns:a16="http://schemas.microsoft.com/office/drawing/2014/main" id="{C51D8CDF-4798-4808-A1A5-7CB0D2DD522E}"/>
               </a:ext>
             </a:extLst>
           </p:cNvPr>
@@ -11256,7 +11264,7 @@
           <p:cNvPr id="7" name="">
             <a:extLst xmlns:a="http://schemas.openxmlformats.org/drawingml/2006/main">
               <a:ext uri="{FF2B5EF4-FFF2-40B4-BE49-F238E27FC236}">
-                <a16:creationId xmlns:a16="http://schemas.microsoft.com/office/drawing/2014/main" id="{7848C4D9-552B-4034-8BE5-BAD25340E6D1}"/>
+                <a16:creationId xmlns:a16="http://schemas.microsoft.com/office/drawing/2014/main" id="{47D049D3-BE5F-4CCC-93D7-C61AF47B49BC}"/>
               </a:ext>
             </a:extLst>
           </p:cNvPr>
@@ -11288,7 +11296,7 @@
           <p:cNvPr id="8" name="">
             <a:extLst xmlns:a="http://schemas.openxmlformats.org/drawingml/2006/main">
               <a:ext uri="{FF2B5EF4-FFF2-40B4-BE49-F238E27FC236}">
-                <a16:creationId xmlns:a16="http://schemas.microsoft.com/office/drawing/2014/main" id="{7FD14B0E-D93F-4A5D-9F8D-9008E8A95E1D}"/>
+                <a16:creationId xmlns:a16="http://schemas.microsoft.com/office/drawing/2014/main" id="{A3483326-8187-43EB-B3D1-1DE6BD03DF8E}"/>
               </a:ext>
             </a:extLst>
           </p:cNvPr>
@@ -11345,7 +11353,7 @@
           <p:cNvPr id="9" name="">
             <a:extLst xmlns:a="http://schemas.openxmlformats.org/drawingml/2006/main">
               <a:ext uri="{FF2B5EF4-FFF2-40B4-BE49-F238E27FC236}">
-                <a16:creationId xmlns:a16="http://schemas.microsoft.com/office/drawing/2014/main" id="{DA599C9A-2A78-4803-9978-09E0D3522AEC}"/>
+                <a16:creationId xmlns:a16="http://schemas.microsoft.com/office/drawing/2014/main" id="{B7C3C8C8-217E-441D-86F5-CF5B8563D584}"/>
               </a:ext>
             </a:extLst>
           </p:cNvPr>
@@ -11406,7 +11414,7 @@
           <p:nvPr/>
         </p:nvPicPr>
         <p:blipFill>
-          <a:blip xmlns:r="http://schemas.openxmlformats.org/officeDocument/2006/relationships" xmlns:a="http://schemas.openxmlformats.org/drawingml/2006/main" r:embed="R5608c0b2c1324294"/>
+          <a:blip xmlns:r="http://schemas.openxmlformats.org/officeDocument/2006/relationships" xmlns:a="http://schemas.openxmlformats.org/drawingml/2006/main" r:embed="R69c6ee12ac3b4f5a"/>
           <a:stretch xmlns:a="http://schemas.openxmlformats.org/drawingml/2006/main"/>
         </p:blipFill>
         <p:spPr>
@@ -11424,7 +11432,7 @@
           <p:cNvPr id="11" name="">
             <a:extLst xmlns:a="http://schemas.openxmlformats.org/drawingml/2006/main">
               <a:ext uri="{FF2B5EF4-FFF2-40B4-BE49-F238E27FC236}">
-                <a16:creationId xmlns:a16="http://schemas.microsoft.com/office/drawing/2014/main" id="{08790A5D-8008-4E5A-AEC0-B1A42D3132AF}"/>
+                <a16:creationId xmlns:a16="http://schemas.microsoft.com/office/drawing/2014/main" id="{B8C0289E-647B-4D39-AEE1-C1ADB2E5EF40}"/>
               </a:ext>
             </a:extLst>
           </p:cNvPr>
@@ -11481,7 +11489,7 @@
           <p:cNvPr id="12" name="">
             <a:extLst xmlns:a="http://schemas.openxmlformats.org/drawingml/2006/main">
               <a:ext uri="{FF2B5EF4-FFF2-40B4-BE49-F238E27FC236}">
-                <a16:creationId xmlns:a16="http://schemas.microsoft.com/office/drawing/2014/main" id="{4AFF515D-1693-4C3B-9DB6-E2411608ADAE}"/>
+                <a16:creationId xmlns:a16="http://schemas.microsoft.com/office/drawing/2014/main" id="{51372A19-21B5-4E4C-AF11-766D4FA4426B}"/>
               </a:ext>
             </a:extLst>
           </p:cNvPr>
@@ -11538,7 +11546,7 @@
           <p:cNvPr id="13" name="">
             <a:extLst xmlns:a="http://schemas.openxmlformats.org/drawingml/2006/main">
               <a:ext uri="{FF2B5EF4-FFF2-40B4-BE49-F238E27FC236}">
-                <a16:creationId xmlns:a16="http://schemas.microsoft.com/office/drawing/2014/main" id="{AF67A4B3-DB83-41A6-93C4-341994B6842B}"/>
+                <a16:creationId xmlns:a16="http://schemas.microsoft.com/office/drawing/2014/main" id="{BAFA9A2F-8740-41E9-A270-DEF89855F7F5}"/>
               </a:ext>
             </a:extLst>
           </p:cNvPr>
@@ -11570,7 +11578,7 @@
           <p:cNvPr id="14" name="">
             <a:extLst xmlns:a="http://schemas.openxmlformats.org/drawingml/2006/main">
               <a:ext uri="{FF2B5EF4-FFF2-40B4-BE49-F238E27FC236}">
-                <a16:creationId xmlns:a16="http://schemas.microsoft.com/office/drawing/2014/main" id="{A0C4977E-6653-4092-9AFA-F87581621ABA}"/>
+                <a16:creationId xmlns:a16="http://schemas.microsoft.com/office/drawing/2014/main" id="{B214BB5E-7E1E-45D6-8B1E-16B94E7BF12A}"/>
               </a:ext>
             </a:extLst>
           </p:cNvPr>
@@ -11627,7 +11635,7 @@
           <p:cNvPr id="15" name="">
             <a:extLst xmlns:a="http://schemas.openxmlformats.org/drawingml/2006/main">
               <a:ext uri="{FF2B5EF4-FFF2-40B4-BE49-F238E27FC236}">
-                <a16:creationId xmlns:a16="http://schemas.microsoft.com/office/drawing/2014/main" id="{0FF9D9B6-CAC0-467A-8324-3C0F1BF7E198}"/>
+                <a16:creationId xmlns:a16="http://schemas.microsoft.com/office/drawing/2014/main" id="{86A65B35-7D24-492C-B1BA-6E61F7C40EA3}"/>
               </a:ext>
             </a:extLst>
           </p:cNvPr>
@@ -11682,7 +11690,7 @@
     </p:spTree>
     <p:extLst>
       <p:ext uri="{BB962C8B-B14F-4D97-AF65-F5344CB8AC3E}">
-        <p14:creationId xmlns:p14="http://schemas.microsoft.com/office/powerpoint/2010/main" val="1409739970"/>
+        <p14:creationId xmlns:p14="http://schemas.microsoft.com/office/powerpoint/2010/main" val="128410470"/>
       </p:ext>
     </p:extLst>
   </p:cSld>
@@ -11837,7 +11845,7 @@
           <p:cNvPr id="23" name="">
             <a:extLst xmlns:a="http://schemas.openxmlformats.org/drawingml/2006/main">
               <a:ext uri="{FF2B5EF4-FFF2-40B4-BE49-F238E27FC236}">
-                <a16:creationId xmlns:a16="http://schemas.microsoft.com/office/drawing/2014/main" id="{5BF3902A-0171-4526-913D-61C9EC8DAC76}"/>
+                <a16:creationId xmlns:a16="http://schemas.microsoft.com/office/drawing/2014/main" id="{EB7F81C8-2C86-41E5-B2F1-70F01D878BF0}"/>
               </a:ext>
             </a:extLst>
           </p:cNvPr>
@@ -11869,7 +11877,7 @@
           <p:cNvPr id="2" name="">
             <a:extLst xmlns:a="http://schemas.openxmlformats.org/drawingml/2006/main">
               <a:ext uri="{FF2B5EF4-FFF2-40B4-BE49-F238E27FC236}">
-                <a16:creationId xmlns:a16="http://schemas.microsoft.com/office/drawing/2014/main" id="{F40A1B3D-AE8E-4821-868B-CCA50661D3C3}"/>
+                <a16:creationId xmlns:a16="http://schemas.microsoft.com/office/drawing/2014/main" id="{85DA9488-FB73-4A8A-81EC-CC86882E59E9}"/>
               </a:ext>
             </a:extLst>
           </p:cNvPr>
@@ -11926,7 +11934,7 @@
           <p:cNvPr id="3" name="">
             <a:extLst xmlns:a="http://schemas.openxmlformats.org/drawingml/2006/main">
               <a:ext uri="{FF2B5EF4-FFF2-40B4-BE49-F238E27FC236}">
-                <a16:creationId xmlns:a16="http://schemas.microsoft.com/office/drawing/2014/main" id="{477CBCBE-A70F-4B3D-8A78-FF47C41FDBC2}"/>
+                <a16:creationId xmlns:a16="http://schemas.microsoft.com/office/drawing/2014/main" id="{6248D801-366C-46E7-B99D-675223FA72E6}"/>
               </a:ext>
             </a:extLst>
           </p:cNvPr>
@@ -11958,7 +11966,7 @@
           <p:cNvPr id="4" name="">
             <a:extLst xmlns:a="http://schemas.openxmlformats.org/drawingml/2006/main">
               <a:ext uri="{FF2B5EF4-FFF2-40B4-BE49-F238E27FC236}">
-                <a16:creationId xmlns:a16="http://schemas.microsoft.com/office/drawing/2014/main" id="{CD39A19B-4CBB-4540-9DE5-3A19912A0B03}"/>
+                <a16:creationId xmlns:a16="http://schemas.microsoft.com/office/drawing/2014/main" id="{9B3B0118-7152-4ADA-A840-E5A91D23E0DF}"/>
               </a:ext>
             </a:extLst>
           </p:cNvPr>
@@ -12015,7 +12023,7 @@
           <p:cNvPr id="5" name="">
             <a:extLst xmlns:a="http://schemas.openxmlformats.org/drawingml/2006/main">
               <a:ext uri="{FF2B5EF4-FFF2-40B4-BE49-F238E27FC236}">
-                <a16:creationId xmlns:a16="http://schemas.microsoft.com/office/drawing/2014/main" id="{56133E16-9567-4E32-91FD-2F7D27CB6E34}"/>
+                <a16:creationId xmlns:a16="http://schemas.microsoft.com/office/drawing/2014/main" id="{895F1686-0951-42EF-91B3-6A70BAC20CEA}"/>
               </a:ext>
             </a:extLst>
           </p:cNvPr>
@@ -12072,7 +12080,7 @@
           <p:cNvPr id="6" name="">
             <a:extLst xmlns:a="http://schemas.openxmlformats.org/drawingml/2006/main">
               <a:ext uri="{FF2B5EF4-FFF2-40B4-BE49-F238E27FC236}">
-                <a16:creationId xmlns:a16="http://schemas.microsoft.com/office/drawing/2014/main" id="{03C49484-CDC5-49BA-88B4-96A59F78E9CF}"/>
+                <a16:creationId xmlns:a16="http://schemas.microsoft.com/office/drawing/2014/main" id="{3647E4F3-6D35-493A-86B7-470B9D12FED4}"/>
               </a:ext>
             </a:extLst>
           </p:cNvPr>
@@ -12129,7 +12137,7 @@
           <p:cNvPr id="7" name="">
             <a:extLst xmlns:a="http://schemas.openxmlformats.org/drawingml/2006/main">
               <a:ext uri="{FF2B5EF4-FFF2-40B4-BE49-F238E27FC236}">
-                <a16:creationId xmlns:a16="http://schemas.microsoft.com/office/drawing/2014/main" id="{3C6350C5-8C9A-40DF-8617-7ABBABDAA09C}"/>
+                <a16:creationId xmlns:a16="http://schemas.microsoft.com/office/drawing/2014/main" id="{484B732F-8D5B-4D71-9B61-A92AEF5B3C75}"/>
               </a:ext>
             </a:extLst>
           </p:cNvPr>
@@ -12161,7 +12169,7 @@
           <p:cNvPr id="8" name="">
             <a:extLst xmlns:a="http://schemas.openxmlformats.org/drawingml/2006/main">
               <a:ext uri="{FF2B5EF4-FFF2-40B4-BE49-F238E27FC236}">
-                <a16:creationId xmlns:a16="http://schemas.microsoft.com/office/drawing/2014/main" id="{1F4A6FD4-8582-4C83-A3F3-0B72B5344A6A}"/>
+                <a16:creationId xmlns:a16="http://schemas.microsoft.com/office/drawing/2014/main" id="{52DCD9E9-9CF1-4C91-AB28-770007BD5EBB}"/>
               </a:ext>
             </a:extLst>
           </p:cNvPr>
@@ -12218,7 +12226,7 @@
           <p:cNvPr id="9" name="">
             <a:extLst xmlns:a="http://schemas.openxmlformats.org/drawingml/2006/main">
               <a:ext uri="{FF2B5EF4-FFF2-40B4-BE49-F238E27FC236}">
-                <a16:creationId xmlns:a16="http://schemas.microsoft.com/office/drawing/2014/main" id="{D0A0D702-A9AC-44B1-9D3E-EF04354B0522}"/>
+                <a16:creationId xmlns:a16="http://schemas.microsoft.com/office/drawing/2014/main" id="{7F186359-6444-4A86-9A0A-0933952874D7}"/>
               </a:ext>
             </a:extLst>
           </p:cNvPr>
@@ -12275,7 +12283,7 @@
           <p:cNvPr id="10" name="">
             <a:extLst xmlns:a="http://schemas.openxmlformats.org/drawingml/2006/main">
               <a:ext uri="{FF2B5EF4-FFF2-40B4-BE49-F238E27FC236}">
-                <a16:creationId xmlns:a16="http://schemas.microsoft.com/office/drawing/2014/main" id="{1FDDDE59-8FFF-4BAE-BE03-B1DF79A05C5D}"/>
+                <a16:creationId xmlns:a16="http://schemas.microsoft.com/office/drawing/2014/main" id="{1BDAA2FB-EFB7-44C5-93BD-E572D294CC9B}"/>
               </a:ext>
             </a:extLst>
           </p:cNvPr>
@@ -12309,7 +12317,7 @@
           <p:cNvPr id="11" name="">
             <a:extLst xmlns:a="http://schemas.openxmlformats.org/drawingml/2006/main">
               <a:ext uri="{FF2B5EF4-FFF2-40B4-BE49-F238E27FC236}">
-                <a16:creationId xmlns:a16="http://schemas.microsoft.com/office/drawing/2014/main" id="{AA969CB6-8653-46BE-9B29-54777AD08604}"/>
+                <a16:creationId xmlns:a16="http://schemas.microsoft.com/office/drawing/2014/main" id="{87CADDEC-49A0-4A02-A7FF-EF2A0BE2F8C7}"/>
               </a:ext>
             </a:extLst>
           </p:cNvPr>
@@ -12341,7 +12349,7 @@
           <p:cNvPr id="12" name="">
             <a:extLst xmlns:a="http://schemas.openxmlformats.org/drawingml/2006/main">
               <a:ext uri="{FF2B5EF4-FFF2-40B4-BE49-F238E27FC236}">
-                <a16:creationId xmlns:a16="http://schemas.microsoft.com/office/drawing/2014/main" id="{00FC7A37-88E1-4163-9D32-B5F73E61DB31}"/>
+                <a16:creationId xmlns:a16="http://schemas.microsoft.com/office/drawing/2014/main" id="{E6D39425-07F8-46D5-A10B-9CDC838EF7BB}"/>
               </a:ext>
             </a:extLst>
           </p:cNvPr>
@@ -12398,7 +12406,7 @@
           <p:cNvPr id="13" name="">
             <a:extLst xmlns:a="http://schemas.openxmlformats.org/drawingml/2006/main">
               <a:ext uri="{FF2B5EF4-FFF2-40B4-BE49-F238E27FC236}">
-                <a16:creationId xmlns:a16="http://schemas.microsoft.com/office/drawing/2014/main" id="{6B35A5DA-695D-4AF8-8755-F2B61D173C13}"/>
+                <a16:creationId xmlns:a16="http://schemas.microsoft.com/office/drawing/2014/main" id="{76055519-C406-4A34-8A62-03229490D170}"/>
               </a:ext>
             </a:extLst>
           </p:cNvPr>
@@ -12455,7 +12463,7 @@
           <p:cNvPr id="14" name="">
             <a:extLst xmlns:a="http://schemas.openxmlformats.org/drawingml/2006/main">
               <a:ext uri="{FF2B5EF4-FFF2-40B4-BE49-F238E27FC236}">
-                <a16:creationId xmlns:a16="http://schemas.microsoft.com/office/drawing/2014/main" id="{F51749CB-C30E-41D7-B764-16494886E6C9}"/>
+                <a16:creationId xmlns:a16="http://schemas.microsoft.com/office/drawing/2014/main" id="{D73BF060-8393-487B-9A85-056B1B762048}"/>
               </a:ext>
             </a:extLst>
           </p:cNvPr>
@@ -12489,7 +12497,7 @@
           <p:cNvPr id="15" name="">
             <a:extLst xmlns:a="http://schemas.openxmlformats.org/drawingml/2006/main">
               <a:ext uri="{FF2B5EF4-FFF2-40B4-BE49-F238E27FC236}">
-                <a16:creationId xmlns:a16="http://schemas.microsoft.com/office/drawing/2014/main" id="{A8CAB79C-BAC2-4BA5-B6A8-B8C5F5EAD11F}"/>
+                <a16:creationId xmlns:a16="http://schemas.microsoft.com/office/drawing/2014/main" id="{12D0D753-AFA7-4446-B601-61D145AED7A6}"/>
               </a:ext>
             </a:extLst>
           </p:cNvPr>
@@ -12521,7 +12529,7 @@
           <p:cNvPr id="16" name="">
             <a:extLst xmlns:a="http://schemas.openxmlformats.org/drawingml/2006/main">
               <a:ext uri="{FF2B5EF4-FFF2-40B4-BE49-F238E27FC236}">
-                <a16:creationId xmlns:a16="http://schemas.microsoft.com/office/drawing/2014/main" id="{ECEE84CB-7D44-4C5C-A040-C613DF4679D9}"/>
+                <a16:creationId xmlns:a16="http://schemas.microsoft.com/office/drawing/2014/main" id="{F91E46D5-5C3D-4901-984A-4BBD3B8B7B18}"/>
               </a:ext>
             </a:extLst>
           </p:cNvPr>
@@ -12578,7 +12586,7 @@
           <p:cNvPr id="17" name="">
             <a:extLst xmlns:a="http://schemas.openxmlformats.org/drawingml/2006/main">
               <a:ext uri="{FF2B5EF4-FFF2-40B4-BE49-F238E27FC236}">
-                <a16:creationId xmlns:a16="http://schemas.microsoft.com/office/drawing/2014/main" id="{8A055F96-ED1A-4207-AF36-474F733235D5}"/>
+                <a16:creationId xmlns:a16="http://schemas.microsoft.com/office/drawing/2014/main" id="{8C54D1B2-0F98-41DC-887A-1CDAB5A60433}"/>
               </a:ext>
             </a:extLst>
           </p:cNvPr>
@@ -12635,7 +12643,7 @@
           <p:cNvPr id="18" name="">
             <a:extLst xmlns:a="http://schemas.openxmlformats.org/drawingml/2006/main">
               <a:ext uri="{FF2B5EF4-FFF2-40B4-BE49-F238E27FC236}">
-                <a16:creationId xmlns:a16="http://schemas.microsoft.com/office/drawing/2014/main" id="{DAA57291-1C07-4052-ABA4-C880DE998199}"/>
+                <a16:creationId xmlns:a16="http://schemas.microsoft.com/office/drawing/2014/main" id="{226CCC1C-00DC-4922-A74D-D83F17A49D1E}"/>
               </a:ext>
             </a:extLst>
           </p:cNvPr>
@@ -12669,7 +12677,7 @@
           <p:cNvPr id="19" name="">
             <a:extLst xmlns:a="http://schemas.openxmlformats.org/drawingml/2006/main">
               <a:ext uri="{FF2B5EF4-FFF2-40B4-BE49-F238E27FC236}">
-                <a16:creationId xmlns:a16="http://schemas.microsoft.com/office/drawing/2014/main" id="{0BB9B656-7DAC-4F9D-9A46-B696C484F110}"/>
+                <a16:creationId xmlns:a16="http://schemas.microsoft.com/office/drawing/2014/main" id="{2749A4B7-35EF-41E2-83DA-C401B4703C44}"/>
               </a:ext>
             </a:extLst>
           </p:cNvPr>
@@ -12701,7 +12709,7 @@
           <p:cNvPr id="20" name="">
             <a:extLst xmlns:a="http://schemas.openxmlformats.org/drawingml/2006/main">
               <a:ext uri="{FF2B5EF4-FFF2-40B4-BE49-F238E27FC236}">
-                <a16:creationId xmlns:a16="http://schemas.microsoft.com/office/drawing/2014/main" id="{2C08338E-7BC8-4898-AA11-65E2F0A0FEE3}"/>
+                <a16:creationId xmlns:a16="http://schemas.microsoft.com/office/drawing/2014/main" id="{7BCD5552-CCFC-44AA-B821-CD6021D9AA8D}"/>
               </a:ext>
             </a:extLst>
           </p:cNvPr>
@@ -12758,7 +12766,7 @@
           <p:cNvPr id="21" name="">
             <a:extLst xmlns:a="http://schemas.openxmlformats.org/drawingml/2006/main">
               <a:ext uri="{FF2B5EF4-FFF2-40B4-BE49-F238E27FC236}">
-                <a16:creationId xmlns:a16="http://schemas.microsoft.com/office/drawing/2014/main" id="{6F910CC1-17E6-4A2F-98A9-760DA9479C16}"/>
+                <a16:creationId xmlns:a16="http://schemas.microsoft.com/office/drawing/2014/main" id="{70AE5EDE-1BCD-4B65-8C09-15FC281E0167}"/>
               </a:ext>
             </a:extLst>
           </p:cNvPr>
@@ -12815,7 +12823,7 @@
           <p:cNvPr id="22" name="">
             <a:extLst xmlns:a="http://schemas.openxmlformats.org/drawingml/2006/main">
               <a:ext uri="{FF2B5EF4-FFF2-40B4-BE49-F238E27FC236}">
-                <a16:creationId xmlns:a16="http://schemas.microsoft.com/office/drawing/2014/main" id="{96E84554-8919-4622-BA51-013D0FFE6D0C}"/>
+                <a16:creationId xmlns:a16="http://schemas.microsoft.com/office/drawing/2014/main" id="{0CD0825E-B367-4667-83B5-276A8A2BC0B2}"/>
               </a:ext>
             </a:extLst>
           </p:cNvPr>
@@ -12870,7 +12878,7 @@
     </p:spTree>
     <p:extLst>
       <p:ext uri="{BB962C8B-B14F-4D97-AF65-F5344CB8AC3E}">
-        <p14:creationId xmlns:p14="http://schemas.microsoft.com/office/powerpoint/2010/main" val="51678607"/>
+        <p14:creationId xmlns:p14="http://schemas.microsoft.com/office/powerpoint/2010/main" val="158231107"/>
       </p:ext>
     </p:extLst>
   </p:cSld>
@@ -13071,7 +13079,7 @@
           <p:cNvPr id="22" name="">
             <a:extLst xmlns:a="http://schemas.openxmlformats.org/drawingml/2006/main">
               <a:ext uri="{FF2B5EF4-FFF2-40B4-BE49-F238E27FC236}">
-                <a16:creationId xmlns:a16="http://schemas.microsoft.com/office/drawing/2014/main" id="{224C35FF-12BA-404A-BDF2-CDA2393AEF88}"/>
+                <a16:creationId xmlns:a16="http://schemas.microsoft.com/office/drawing/2014/main" id="{37A1798E-0F4C-4BCC-AD06-F62166A1FA20}"/>
               </a:ext>
             </a:extLst>
           </p:cNvPr>
@@ -13103,7 +13111,7 @@
           <p:cNvPr id="2" name="">
             <a:extLst xmlns:a="http://schemas.openxmlformats.org/drawingml/2006/main">
               <a:ext uri="{FF2B5EF4-FFF2-40B4-BE49-F238E27FC236}">
-                <a16:creationId xmlns:a16="http://schemas.microsoft.com/office/drawing/2014/main" id="{040D5D1D-9396-43F3-BDF9-D5B4BCC8B971}"/>
+                <a16:creationId xmlns:a16="http://schemas.microsoft.com/office/drawing/2014/main" id="{B5031855-5783-454C-B63E-186E29A6E792}"/>
               </a:ext>
             </a:extLst>
           </p:cNvPr>
@@ -13160,7 +13168,7 @@
           <p:cNvPr id="3" name="">
             <a:extLst xmlns:a="http://schemas.openxmlformats.org/drawingml/2006/main">
               <a:ext uri="{FF2B5EF4-FFF2-40B4-BE49-F238E27FC236}">
-                <a16:creationId xmlns:a16="http://schemas.microsoft.com/office/drawing/2014/main" id="{82F24F59-95E9-450E-A26F-83F6651FF7AA}"/>
+                <a16:creationId xmlns:a16="http://schemas.microsoft.com/office/drawing/2014/main" id="{C786816B-293A-4A04-AA75-60080F379684}"/>
               </a:ext>
             </a:extLst>
           </p:cNvPr>
@@ -13192,7 +13200,7 @@
           <p:cNvPr id="4" name="">
             <a:extLst xmlns:a="http://schemas.openxmlformats.org/drawingml/2006/main">
               <a:ext uri="{FF2B5EF4-FFF2-40B4-BE49-F238E27FC236}">
-                <a16:creationId xmlns:a16="http://schemas.microsoft.com/office/drawing/2014/main" id="{4E58B4F8-49FB-429D-9D51-043CC1FAA40D}"/>
+                <a16:creationId xmlns:a16="http://schemas.microsoft.com/office/drawing/2014/main" id="{F6D4B7CA-711A-4487-BAAB-519564320039}"/>
               </a:ext>
             </a:extLst>
           </p:cNvPr>
@@ -13249,7 +13257,7 @@
           <p:cNvPr id="5" name="">
             <a:extLst xmlns:a="http://schemas.openxmlformats.org/drawingml/2006/main">
               <a:ext uri="{FF2B5EF4-FFF2-40B4-BE49-F238E27FC236}">
-                <a16:creationId xmlns:a16="http://schemas.microsoft.com/office/drawing/2014/main" id="{1B2A3D3F-B620-40AF-AD56-8822C7BB47BF}"/>
+                <a16:creationId xmlns:a16="http://schemas.microsoft.com/office/drawing/2014/main" id="{E097C41C-5A35-4057-A7A0-5684C361505A}"/>
               </a:ext>
             </a:extLst>
           </p:cNvPr>
@@ -13306,7 +13314,7 @@
           <p:cNvPr id="6" name="">
             <a:extLst xmlns:a="http://schemas.openxmlformats.org/drawingml/2006/main">
               <a:ext uri="{FF2B5EF4-FFF2-40B4-BE49-F238E27FC236}">
-                <a16:creationId xmlns:a16="http://schemas.microsoft.com/office/drawing/2014/main" id="{D4283666-62E0-4257-9128-2E1F59B9510E}"/>
+                <a16:creationId xmlns:a16="http://schemas.microsoft.com/office/drawing/2014/main" id="{FDCF7621-B660-4542-8EEC-55600FEB856B}"/>
               </a:ext>
             </a:extLst>
           </p:cNvPr>
@@ -13363,7 +13371,7 @@
           <p:cNvPr id="7" name="">
             <a:extLst xmlns:a="http://schemas.openxmlformats.org/drawingml/2006/main">
               <a:ext uri="{FF2B5EF4-FFF2-40B4-BE49-F238E27FC236}">
-                <a16:creationId xmlns:a16="http://schemas.microsoft.com/office/drawing/2014/main" id="{40BF30E1-BF73-47A3-95DE-06073284A426}"/>
+                <a16:creationId xmlns:a16="http://schemas.microsoft.com/office/drawing/2014/main" id="{8158D87F-64AC-4DBE-BA05-F05566D98601}"/>
               </a:ext>
             </a:extLst>
           </p:cNvPr>
@@ -13395,7 +13403,7 @@
           <p:cNvPr id="8" name="">
             <a:extLst xmlns:a="http://schemas.openxmlformats.org/drawingml/2006/main">
               <a:ext uri="{FF2B5EF4-FFF2-40B4-BE49-F238E27FC236}">
-                <a16:creationId xmlns:a16="http://schemas.microsoft.com/office/drawing/2014/main" id="{0E0395F4-C62E-4534-A5FB-D0F3F4CFC1B7}"/>
+                <a16:creationId xmlns:a16="http://schemas.microsoft.com/office/drawing/2014/main" id="{21639BEB-3F20-430C-B255-BC828B900663}"/>
               </a:ext>
             </a:extLst>
           </p:cNvPr>
@@ -13452,7 +13460,7 @@
           <p:cNvPr id="9" name="">
             <a:extLst xmlns:a="http://schemas.openxmlformats.org/drawingml/2006/main">
               <a:ext uri="{FF2B5EF4-FFF2-40B4-BE49-F238E27FC236}">
-                <a16:creationId xmlns:a16="http://schemas.microsoft.com/office/drawing/2014/main" id="{9275D7B0-4D58-4DC6-BDF0-783C4BADD440}"/>
+                <a16:creationId xmlns:a16="http://schemas.microsoft.com/office/drawing/2014/main" id="{8A6B565B-C01F-468D-A2A5-8FACF6CBCB51}"/>
               </a:ext>
             </a:extLst>
           </p:cNvPr>
@@ -13509,7 +13517,7 @@
           <p:cNvPr id="10" name="">
             <a:extLst xmlns:a="http://schemas.openxmlformats.org/drawingml/2006/main">
               <a:ext uri="{FF2B5EF4-FFF2-40B4-BE49-F238E27FC236}">
-                <a16:creationId xmlns:a16="http://schemas.microsoft.com/office/drawing/2014/main" id="{ABEEB52F-CCD9-4D14-A84F-F5F7DE06146F}"/>
+                <a16:creationId xmlns:a16="http://schemas.microsoft.com/office/drawing/2014/main" id="{4A59BB3E-C044-4736-9445-17B145382938}"/>
               </a:ext>
             </a:extLst>
           </p:cNvPr>
@@ -13543,7 +13551,7 @@
           <p:cNvPr id="11" name="">
             <a:extLst xmlns:a="http://schemas.openxmlformats.org/drawingml/2006/main">
               <a:ext uri="{FF2B5EF4-FFF2-40B4-BE49-F238E27FC236}">
-                <a16:creationId xmlns:a16="http://schemas.microsoft.com/office/drawing/2014/main" id="{5DDA63DD-13C0-4222-B604-5864D774AEAC}"/>
+                <a16:creationId xmlns:a16="http://schemas.microsoft.com/office/drawing/2014/main" id="{95789EDA-1325-4E3A-AE5A-33F4258983A8}"/>
               </a:ext>
             </a:extLst>
           </p:cNvPr>
@@ -13575,7 +13583,7 @@
           <p:cNvPr id="12" name="">
             <a:extLst xmlns:a="http://schemas.openxmlformats.org/drawingml/2006/main">
               <a:ext uri="{FF2B5EF4-FFF2-40B4-BE49-F238E27FC236}">
-                <a16:creationId xmlns:a16="http://schemas.microsoft.com/office/drawing/2014/main" id="{A190F075-D4DE-40D7-A737-A1F52ABF696C}"/>
+                <a16:creationId xmlns:a16="http://schemas.microsoft.com/office/drawing/2014/main" id="{2F5C6979-9B98-457D-959E-E867A755665E}"/>
               </a:ext>
             </a:extLst>
           </p:cNvPr>
@@ -13632,7 +13640,7 @@
           <p:cNvPr id="13" name="">
             <a:extLst xmlns:a="http://schemas.openxmlformats.org/drawingml/2006/main">
               <a:ext uri="{FF2B5EF4-FFF2-40B4-BE49-F238E27FC236}">
-                <a16:creationId xmlns:a16="http://schemas.microsoft.com/office/drawing/2014/main" id="{3D17E535-979C-4D52-BCCA-4B2A0C159E46}"/>
+                <a16:creationId xmlns:a16="http://schemas.microsoft.com/office/drawing/2014/main" id="{9D290077-3290-4D3E-B303-4EF3B95E86B3}"/>
               </a:ext>
             </a:extLst>
           </p:cNvPr>
@@ -13689,7 +13697,7 @@
           <p:cNvPr id="14" name="">
             <a:extLst xmlns:a="http://schemas.openxmlformats.org/drawingml/2006/main">
               <a:ext uri="{FF2B5EF4-FFF2-40B4-BE49-F238E27FC236}">
-                <a16:creationId xmlns:a16="http://schemas.microsoft.com/office/drawing/2014/main" id="{576655C6-31B9-4F18-9695-AE71D795BF0B}"/>
+                <a16:creationId xmlns:a16="http://schemas.microsoft.com/office/drawing/2014/main" id="{89B28D99-6EE6-4583-BFF8-DEC889B623EB}"/>
               </a:ext>
             </a:extLst>
           </p:cNvPr>
@@ -13723,7 +13731,7 @@
           <p:cNvPr id="15" name="">
             <a:extLst xmlns:a="http://schemas.openxmlformats.org/drawingml/2006/main">
               <a:ext uri="{FF2B5EF4-FFF2-40B4-BE49-F238E27FC236}">
-                <a16:creationId xmlns:a16="http://schemas.microsoft.com/office/drawing/2014/main" id="{CAFA2247-4FD3-416D-9A74-50FA64DD66E1}"/>
+                <a16:creationId xmlns:a16="http://schemas.microsoft.com/office/drawing/2014/main" id="{FFB790B1-3741-4D49-8014-B50ABCEDE1E1}"/>
               </a:ext>
             </a:extLst>
           </p:cNvPr>
@@ -13755,7 +13763,7 @@
           <p:cNvPr id="16" name="">
             <a:extLst xmlns:a="http://schemas.openxmlformats.org/drawingml/2006/main">
               <a:ext uri="{FF2B5EF4-FFF2-40B4-BE49-F238E27FC236}">
-                <a16:creationId xmlns:a16="http://schemas.microsoft.com/office/drawing/2014/main" id="{A0CB1637-39E7-4468-8859-53DAA8757C2D}"/>
+                <a16:creationId xmlns:a16="http://schemas.microsoft.com/office/drawing/2014/main" id="{9C91DC36-D58F-477F-8BFE-50BF342BDA37}"/>
               </a:ext>
             </a:extLst>
           </p:cNvPr>
@@ -13812,7 +13820,7 @@
           <p:cNvPr id="17" name="">
             <a:extLst xmlns:a="http://schemas.openxmlformats.org/drawingml/2006/main">
               <a:ext uri="{FF2B5EF4-FFF2-40B4-BE49-F238E27FC236}">
-                <a16:creationId xmlns:a16="http://schemas.microsoft.com/office/drawing/2014/main" id="{6A4DCE24-2A51-4088-BBA6-0CDE45CAE32B}"/>
+                <a16:creationId xmlns:a16="http://schemas.microsoft.com/office/drawing/2014/main" id="{D1939A28-6E90-48EB-BC97-6B429294E45D}"/>
               </a:ext>
             </a:extLst>
           </p:cNvPr>
@@ -13869,7 +13877,7 @@
           <p:cNvPr id="18" name="">
             <a:extLst xmlns:a="http://schemas.openxmlformats.org/drawingml/2006/main">
               <a:ext uri="{FF2B5EF4-FFF2-40B4-BE49-F238E27FC236}">
-                <a16:creationId xmlns:a16="http://schemas.microsoft.com/office/drawing/2014/main" id="{EAB01661-373D-4640-BD97-BC1582FD002B}"/>
+                <a16:creationId xmlns:a16="http://schemas.microsoft.com/office/drawing/2014/main" id="{C8659A53-8F17-4657-BF05-E52F658BEA97}"/>
               </a:ext>
             </a:extLst>
           </p:cNvPr>
@@ -13903,7 +13911,7 @@
           <p:cNvPr id="19" name="">
             <a:extLst xmlns:a="http://schemas.openxmlformats.org/drawingml/2006/main">
               <a:ext uri="{FF2B5EF4-FFF2-40B4-BE49-F238E27FC236}">
-                <a16:creationId xmlns:a16="http://schemas.microsoft.com/office/drawing/2014/main" id="{421F24B1-CB39-4067-9C46-59398905B3C4}"/>
+                <a16:creationId xmlns:a16="http://schemas.microsoft.com/office/drawing/2014/main" id="{4556AD2F-D20A-4ADE-B019-C5121667EA4C}"/>
               </a:ext>
             </a:extLst>
           </p:cNvPr>
@@ -13935,7 +13943,7 @@
           <p:cNvPr id="20" name="">
             <a:extLst xmlns:a="http://schemas.openxmlformats.org/drawingml/2006/main">
               <a:ext uri="{FF2B5EF4-FFF2-40B4-BE49-F238E27FC236}">
-                <a16:creationId xmlns:a16="http://schemas.microsoft.com/office/drawing/2014/main" id="{EB88C512-207F-4678-874D-0CD4CAC5730A}"/>
+                <a16:creationId xmlns:a16="http://schemas.microsoft.com/office/drawing/2014/main" id="{EFFFBEF5-F151-43AE-8F94-E358696A93B0}"/>
               </a:ext>
             </a:extLst>
           </p:cNvPr>
@@ -13992,7 +14000,7 @@
           <p:cNvPr id="21" name="">
             <a:extLst xmlns:a="http://schemas.openxmlformats.org/drawingml/2006/main">
               <a:ext uri="{FF2B5EF4-FFF2-40B4-BE49-F238E27FC236}">
-                <a16:creationId xmlns:a16="http://schemas.microsoft.com/office/drawing/2014/main" id="{E207316F-1188-43F6-9AB3-019B081876A7}"/>
+                <a16:creationId xmlns:a16="http://schemas.microsoft.com/office/drawing/2014/main" id="{FD35A309-C462-42FC-90BB-6E4009AE048E}"/>
               </a:ext>
             </a:extLst>
           </p:cNvPr>
@@ -14047,7 +14055,7 @@
     </p:spTree>
     <p:extLst>
       <p:ext uri="{BB962C8B-B14F-4D97-AF65-F5344CB8AC3E}">
-        <p14:creationId xmlns:p14="http://schemas.microsoft.com/office/powerpoint/2010/main" val="2119938385"/>
+        <p14:creationId xmlns:p14="http://schemas.microsoft.com/office/powerpoint/2010/main" val="2012905201"/>
       </p:ext>
     </p:extLst>
   </p:cSld>
